--- a/Konténerek.pptx
+++ b/Konténerek.pptx
@@ -16,6 +16,10 @@
     <p:sldId id="264" r:id="rId10"/>
     <p:sldId id="265" r:id="rId11"/>
     <p:sldId id="266" r:id="rId12"/>
+    <p:sldId id="267" r:id="rId13"/>
+    <p:sldId id="268" r:id="rId14"/>
+    <p:sldId id="269" r:id="rId15"/>
+    <p:sldId id="270" r:id="rId16"/>
   </p:sldIdLst>
   <p:sldSz cx="12192000" cy="6858000"/>
   <p:notesSz cx="6858000" cy="9144000"/>
@@ -114,6 +118,11 @@
       </a:defRPr>
     </a:lvl9pPr>
   </p:defaultTextStyle>
+  <p:extLst>
+    <p:ext uri="{EFAFB233-063F-42B5-8137-9DF3F51BA10A}">
+      <p15:sldGuideLst xmlns:p15="http://schemas.microsoft.com/office/powerpoint/2012/main"/>
+    </p:ext>
+  </p:extLst>
 </p:presentation>
 </file>
 
@@ -248,7 +257,7 @@
           <a:p>
             <a:fld id="{8239ADAC-1920-48B6-9400-36527E1E2438}" type="datetimeFigureOut">
               <a:rPr lang="hu-HU" smtClean="0"/>
-              <a:t>2026. 03. 06.</a:t>
+              <a:t>2026. 03. 09.</a:t>
             </a:fld>
             <a:endParaRPr lang="hu-HU"/>
           </a:p>
@@ -418,7 +427,7 @@
           <a:p>
             <a:fld id="{8239ADAC-1920-48B6-9400-36527E1E2438}" type="datetimeFigureOut">
               <a:rPr lang="hu-HU" smtClean="0"/>
-              <a:t>2026. 03. 06.</a:t>
+              <a:t>2026. 03. 09.</a:t>
             </a:fld>
             <a:endParaRPr lang="hu-HU"/>
           </a:p>
@@ -598,7 +607,7 @@
           <a:p>
             <a:fld id="{8239ADAC-1920-48B6-9400-36527E1E2438}" type="datetimeFigureOut">
               <a:rPr lang="hu-HU" smtClean="0"/>
-              <a:t>2026. 03. 06.</a:t>
+              <a:t>2026. 03. 09.</a:t>
             </a:fld>
             <a:endParaRPr lang="hu-HU"/>
           </a:p>
@@ -768,7 +777,7 @@
           <a:p>
             <a:fld id="{8239ADAC-1920-48B6-9400-36527E1E2438}" type="datetimeFigureOut">
               <a:rPr lang="hu-HU" smtClean="0"/>
-              <a:t>2026. 03. 06.</a:t>
+              <a:t>2026. 03. 09.</a:t>
             </a:fld>
             <a:endParaRPr lang="hu-HU"/>
           </a:p>
@@ -1014,7 +1023,7 @@
           <a:p>
             <a:fld id="{8239ADAC-1920-48B6-9400-36527E1E2438}" type="datetimeFigureOut">
               <a:rPr lang="hu-HU" smtClean="0"/>
-              <a:t>2026. 03. 06.</a:t>
+              <a:t>2026. 03. 09.</a:t>
             </a:fld>
             <a:endParaRPr lang="hu-HU"/>
           </a:p>
@@ -1246,7 +1255,7 @@
           <a:p>
             <a:fld id="{8239ADAC-1920-48B6-9400-36527E1E2438}" type="datetimeFigureOut">
               <a:rPr lang="hu-HU" smtClean="0"/>
-              <a:t>2026. 03. 06.</a:t>
+              <a:t>2026. 03. 09.</a:t>
             </a:fld>
             <a:endParaRPr lang="hu-HU"/>
           </a:p>
@@ -1613,7 +1622,7 @@
           <a:p>
             <a:fld id="{8239ADAC-1920-48B6-9400-36527E1E2438}" type="datetimeFigureOut">
               <a:rPr lang="hu-HU" smtClean="0"/>
-              <a:t>2026. 03. 06.</a:t>
+              <a:t>2026. 03. 09.</a:t>
             </a:fld>
             <a:endParaRPr lang="hu-HU"/>
           </a:p>
@@ -1731,7 +1740,7 @@
           <a:p>
             <a:fld id="{8239ADAC-1920-48B6-9400-36527E1E2438}" type="datetimeFigureOut">
               <a:rPr lang="hu-HU" smtClean="0"/>
-              <a:t>2026. 03. 06.</a:t>
+              <a:t>2026. 03. 09.</a:t>
             </a:fld>
             <a:endParaRPr lang="hu-HU"/>
           </a:p>
@@ -1826,7 +1835,7 @@
           <a:p>
             <a:fld id="{8239ADAC-1920-48B6-9400-36527E1E2438}" type="datetimeFigureOut">
               <a:rPr lang="hu-HU" smtClean="0"/>
-              <a:t>2026. 03. 06.</a:t>
+              <a:t>2026. 03. 09.</a:t>
             </a:fld>
             <a:endParaRPr lang="hu-HU"/>
           </a:p>
@@ -2103,7 +2112,7 @@
           <a:p>
             <a:fld id="{8239ADAC-1920-48B6-9400-36527E1E2438}" type="datetimeFigureOut">
               <a:rPr lang="hu-HU" smtClean="0"/>
-              <a:t>2026. 03. 06.</a:t>
+              <a:t>2026. 03. 09.</a:t>
             </a:fld>
             <a:endParaRPr lang="hu-HU"/>
           </a:p>
@@ -2356,7 +2365,7 @@
           <a:p>
             <a:fld id="{8239ADAC-1920-48B6-9400-36527E1E2438}" type="datetimeFigureOut">
               <a:rPr lang="hu-HU" smtClean="0"/>
-              <a:t>2026. 03. 06.</a:t>
+              <a:t>2026. 03. 09.</a:t>
             </a:fld>
             <a:endParaRPr lang="hu-HU"/>
           </a:p>
@@ -2569,7 +2578,7 @@
           <a:p>
             <a:fld id="{8239ADAC-1920-48B6-9400-36527E1E2438}" type="datetimeFigureOut">
               <a:rPr lang="hu-HU" smtClean="0"/>
-              <a:t>2026. 03. 06.</a:t>
+              <a:t>2026. 03. 09.</a:t>
             </a:fld>
             <a:endParaRPr lang="hu-HU"/>
           </a:p>
@@ -3061,7 +3070,11 @@
           <a:bodyPr/>
           <a:lstStyle/>
           <a:p>
-            <a:endParaRPr lang="hu-HU"/>
+            <a:r>
+              <a:rPr lang="hu-HU" dirty="0" smtClean="0"/>
+              <a:t>Mikor érdemes</a:t>
+            </a:r>
+            <a:endParaRPr lang="hu-HU" dirty="0"/>
           </a:p>
         </p:txBody>
       </p:sp>
@@ -3080,7 +3093,43 @@
           <a:bodyPr/>
           <a:lstStyle/>
           <a:p>
-            <a:endParaRPr lang="hu-HU"/>
+            <a:pPr fontAlgn="base"/>
+            <a:r>
+              <a:rPr lang="hu-HU" dirty="0"/>
+              <a:t>Nagy mennyiségű árut kell messzi </a:t>
+            </a:r>
+            <a:r>
+              <a:rPr lang="hu-HU" dirty="0" err="1"/>
+              <a:t>uticélra</a:t>
+            </a:r>
+            <a:r>
+              <a:rPr lang="hu-HU" dirty="0"/>
+              <a:t> szállítani.</a:t>
+            </a:r>
+          </a:p>
+          <a:p>
+            <a:pPr fontAlgn="base"/>
+            <a:r>
+              <a:rPr lang="hu-HU" dirty="0"/>
+              <a:t>Fontos a rakomány biztonsága és védelme.</a:t>
+            </a:r>
+          </a:p>
+          <a:p>
+            <a:pPr fontAlgn="base"/>
+            <a:r>
+              <a:rPr lang="hu-HU" dirty="0"/>
+              <a:t>Költséghatékony megoldást keres a nemzetközi szállítmányozásra.</a:t>
+            </a:r>
+          </a:p>
+          <a:p>
+            <a:pPr fontAlgn="base"/>
+            <a:r>
+              <a:rPr lang="hu-HU" dirty="0"/>
+              <a:t>Rendszeres vagy ismétlődő szállításokra van szükség.</a:t>
+            </a:r>
+          </a:p>
+          <a:p>
+            <a:endParaRPr lang="hu-HU" dirty="0"/>
           </a:p>
         </p:txBody>
       </p:sp>
@@ -3129,6 +3178,10 @@
           <a:bodyPr/>
           <a:lstStyle/>
           <a:p>
+            <a:r>
+              <a:rPr lang="hu-HU" dirty="0" smtClean="0"/>
+              <a:t>Alkalmazási területek</a:t>
+            </a:r>
             <a:endParaRPr lang="hu-HU" dirty="0"/>
           </a:p>
         </p:txBody>
@@ -3156,6 +3209,282 @@
     <p:extLst>
       <p:ext uri="{BB962C8B-B14F-4D97-AF65-F5344CB8AC3E}">
         <p14:creationId xmlns:p14="http://schemas.microsoft.com/office/powerpoint/2010/main" val="3638036783"/>
+      </p:ext>
+    </p:extLst>
+  </p:cSld>
+  <p:clrMapOvr>
+    <a:masterClrMapping/>
+  </p:clrMapOvr>
+</p:sld>
+</file>
+
+<file path=ppt/slides/slide12.xml><?xml version="1.0" encoding="utf-8"?>
+<p:sld xmlns:a="http://schemas.openxmlformats.org/drawingml/2006/main" xmlns:r="http://schemas.openxmlformats.org/officeDocument/2006/relationships" xmlns:p="http://schemas.openxmlformats.org/presentationml/2006/main">
+  <p:cSld>
+    <p:spTree>
+      <p:nvGrpSpPr>
+        <p:cNvPr id="1" name=""/>
+        <p:cNvGrpSpPr/>
+        <p:nvPr/>
+      </p:nvGrpSpPr>
+      <p:grpSpPr>
+        <a:xfrm>
+          <a:off x="0" y="0"/>
+          <a:ext cx="0" cy="0"/>
+          <a:chOff x="0" y="0"/>
+          <a:chExt cx="0" cy="0"/>
+        </a:xfrm>
+      </p:grpSpPr>
+      <p:sp>
+        <p:nvSpPr>
+          <p:cNvPr id="2" name="Cím 1"/>
+          <p:cNvSpPr>
+            <a:spLocks noGrp="1"/>
+          </p:cNvSpPr>
+          <p:nvPr>
+            <p:ph type="title"/>
+          </p:nvPr>
+        </p:nvSpPr>
+        <p:spPr/>
+        <p:txBody>
+          <a:bodyPr/>
+          <a:lstStyle/>
+          <a:p>
+            <a:r>
+              <a:rPr lang="hu-HU" b="1"/>
+              <a:t> Mire figyeljen bérlés vagy vásárlás előtt?</a:t>
+            </a:r>
+            <a:endParaRPr lang="hu-HU"/>
+          </a:p>
+        </p:txBody>
+      </p:sp>
+      <p:sp>
+        <p:nvSpPr>
+          <p:cNvPr id="3" name="Tartalom helye 2"/>
+          <p:cNvSpPr>
+            <a:spLocks noGrp="1"/>
+          </p:cNvSpPr>
+          <p:nvPr>
+            <p:ph idx="1"/>
+          </p:nvPr>
+        </p:nvSpPr>
+        <p:spPr/>
+        <p:txBody>
+          <a:bodyPr/>
+          <a:lstStyle/>
+          <a:p>
+            <a:endParaRPr lang="hu-HU"/>
+          </a:p>
+        </p:txBody>
+      </p:sp>
+    </p:spTree>
+    <p:extLst>
+      <p:ext uri="{BB962C8B-B14F-4D97-AF65-F5344CB8AC3E}">
+        <p14:creationId xmlns:p14="http://schemas.microsoft.com/office/powerpoint/2010/main" val="3589918386"/>
+      </p:ext>
+    </p:extLst>
+  </p:cSld>
+  <p:clrMapOvr>
+    <a:masterClrMapping/>
+  </p:clrMapOvr>
+</p:sld>
+</file>
+
+<file path=ppt/slides/slide13.xml><?xml version="1.0" encoding="utf-8"?>
+<p:sld xmlns:a="http://schemas.openxmlformats.org/drawingml/2006/main" xmlns:r="http://schemas.openxmlformats.org/officeDocument/2006/relationships" xmlns:p="http://schemas.openxmlformats.org/presentationml/2006/main">
+  <p:cSld>
+    <p:spTree>
+      <p:nvGrpSpPr>
+        <p:cNvPr id="1" name=""/>
+        <p:cNvGrpSpPr/>
+        <p:nvPr/>
+      </p:nvGrpSpPr>
+      <p:grpSpPr>
+        <a:xfrm>
+          <a:off x="0" y="0"/>
+          <a:ext cx="0" cy="0"/>
+          <a:chOff x="0" y="0"/>
+          <a:chExt cx="0" cy="0"/>
+        </a:xfrm>
+      </p:grpSpPr>
+      <p:sp>
+        <p:nvSpPr>
+          <p:cNvPr id="2" name="Cím 1"/>
+          <p:cNvSpPr>
+            <a:spLocks noGrp="1"/>
+          </p:cNvSpPr>
+          <p:nvPr>
+            <p:ph type="title"/>
+          </p:nvPr>
+        </p:nvSpPr>
+        <p:spPr/>
+        <p:txBody>
+          <a:bodyPr/>
+          <a:lstStyle/>
+          <a:p>
+            <a:endParaRPr lang="hu-HU"/>
+          </a:p>
+        </p:txBody>
+      </p:sp>
+      <p:sp>
+        <p:nvSpPr>
+          <p:cNvPr id="3" name="Tartalom helye 2"/>
+          <p:cNvSpPr>
+            <a:spLocks noGrp="1"/>
+          </p:cNvSpPr>
+          <p:nvPr>
+            <p:ph idx="1"/>
+          </p:nvPr>
+        </p:nvSpPr>
+        <p:spPr/>
+        <p:txBody>
+          <a:bodyPr/>
+          <a:lstStyle/>
+          <a:p>
+            <a:endParaRPr lang="hu-HU"/>
+          </a:p>
+        </p:txBody>
+      </p:sp>
+    </p:spTree>
+    <p:extLst>
+      <p:ext uri="{BB962C8B-B14F-4D97-AF65-F5344CB8AC3E}">
+        <p14:creationId xmlns:p14="http://schemas.microsoft.com/office/powerpoint/2010/main" val="3480588263"/>
+      </p:ext>
+    </p:extLst>
+  </p:cSld>
+  <p:clrMapOvr>
+    <a:masterClrMapping/>
+  </p:clrMapOvr>
+</p:sld>
+</file>
+
+<file path=ppt/slides/slide14.xml><?xml version="1.0" encoding="utf-8"?>
+<p:sld xmlns:a="http://schemas.openxmlformats.org/drawingml/2006/main" xmlns:r="http://schemas.openxmlformats.org/officeDocument/2006/relationships" xmlns:p="http://schemas.openxmlformats.org/presentationml/2006/main">
+  <p:cSld>
+    <p:spTree>
+      <p:nvGrpSpPr>
+        <p:cNvPr id="1" name=""/>
+        <p:cNvGrpSpPr/>
+        <p:nvPr/>
+      </p:nvGrpSpPr>
+      <p:grpSpPr>
+        <a:xfrm>
+          <a:off x="0" y="0"/>
+          <a:ext cx="0" cy="0"/>
+          <a:chOff x="0" y="0"/>
+          <a:chExt cx="0" cy="0"/>
+        </a:xfrm>
+      </p:grpSpPr>
+      <p:sp>
+        <p:nvSpPr>
+          <p:cNvPr id="2" name="Cím 1"/>
+          <p:cNvSpPr>
+            <a:spLocks noGrp="1"/>
+          </p:cNvSpPr>
+          <p:nvPr>
+            <p:ph type="title"/>
+          </p:nvPr>
+        </p:nvSpPr>
+        <p:spPr/>
+        <p:txBody>
+          <a:bodyPr/>
+          <a:lstStyle/>
+          <a:p>
+            <a:endParaRPr lang="hu-HU"/>
+          </a:p>
+        </p:txBody>
+      </p:sp>
+      <p:sp>
+        <p:nvSpPr>
+          <p:cNvPr id="3" name="Tartalom helye 2"/>
+          <p:cNvSpPr>
+            <a:spLocks noGrp="1"/>
+          </p:cNvSpPr>
+          <p:nvPr>
+            <p:ph idx="1"/>
+          </p:nvPr>
+        </p:nvSpPr>
+        <p:spPr/>
+        <p:txBody>
+          <a:bodyPr/>
+          <a:lstStyle/>
+          <a:p>
+            <a:endParaRPr lang="hu-HU"/>
+          </a:p>
+        </p:txBody>
+      </p:sp>
+    </p:spTree>
+    <p:extLst>
+      <p:ext uri="{BB962C8B-B14F-4D97-AF65-F5344CB8AC3E}">
+        <p14:creationId xmlns:p14="http://schemas.microsoft.com/office/powerpoint/2010/main" val="2662588212"/>
+      </p:ext>
+    </p:extLst>
+  </p:cSld>
+  <p:clrMapOvr>
+    <a:masterClrMapping/>
+  </p:clrMapOvr>
+</p:sld>
+</file>
+
+<file path=ppt/slides/slide15.xml><?xml version="1.0" encoding="utf-8"?>
+<p:sld xmlns:a="http://schemas.openxmlformats.org/drawingml/2006/main" xmlns:r="http://schemas.openxmlformats.org/officeDocument/2006/relationships" xmlns:p="http://schemas.openxmlformats.org/presentationml/2006/main">
+  <p:cSld>
+    <p:spTree>
+      <p:nvGrpSpPr>
+        <p:cNvPr id="1" name=""/>
+        <p:cNvGrpSpPr/>
+        <p:nvPr/>
+      </p:nvGrpSpPr>
+      <p:grpSpPr>
+        <a:xfrm>
+          <a:off x="0" y="0"/>
+          <a:ext cx="0" cy="0"/>
+          <a:chOff x="0" y="0"/>
+          <a:chExt cx="0" cy="0"/>
+        </a:xfrm>
+      </p:grpSpPr>
+      <p:sp>
+        <p:nvSpPr>
+          <p:cNvPr id="2" name="Cím 1"/>
+          <p:cNvSpPr>
+            <a:spLocks noGrp="1"/>
+          </p:cNvSpPr>
+          <p:nvPr>
+            <p:ph type="title"/>
+          </p:nvPr>
+        </p:nvSpPr>
+        <p:spPr/>
+        <p:txBody>
+          <a:bodyPr/>
+          <a:lstStyle/>
+          <a:p>
+            <a:endParaRPr lang="hu-HU"/>
+          </a:p>
+        </p:txBody>
+      </p:sp>
+      <p:sp>
+        <p:nvSpPr>
+          <p:cNvPr id="3" name="Tartalom helye 2"/>
+          <p:cNvSpPr>
+            <a:spLocks noGrp="1"/>
+          </p:cNvSpPr>
+          <p:nvPr>
+            <p:ph idx="1"/>
+          </p:nvPr>
+        </p:nvSpPr>
+        <p:spPr/>
+        <p:txBody>
+          <a:bodyPr/>
+          <a:lstStyle/>
+          <a:p>
+            <a:endParaRPr lang="hu-HU"/>
+          </a:p>
+        </p:txBody>
+      </p:sp>
+    </p:spTree>
+    <p:extLst>
+      <p:ext uri="{BB962C8B-B14F-4D97-AF65-F5344CB8AC3E}">
+        <p14:creationId xmlns:p14="http://schemas.microsoft.com/office/powerpoint/2010/main" val="2102790198"/>
       </p:ext>
     </p:extLst>
   </p:cSld>
@@ -3302,7 +3631,31 @@
           <a:bodyPr/>
           <a:lstStyle/>
           <a:p>
-            <a:endParaRPr lang="hu-HU"/>
+            <a:r>
+              <a:rPr lang="hu-HU" dirty="0"/>
+              <a:t>Tengeri és szállítmányozási konténerek (ISO szabvány</a:t>
+            </a:r>
+            <a:r>
+              <a:rPr lang="hu-HU" dirty="0" smtClean="0"/>
+              <a:t>)</a:t>
+            </a:r>
+          </a:p>
+          <a:p>
+            <a:r>
+              <a:rPr lang="hu-HU" dirty="0"/>
+              <a:t>Hulladékszállító (sittes) </a:t>
+            </a:r>
+            <a:r>
+              <a:rPr lang="hu-HU" dirty="0" smtClean="0"/>
+              <a:t>konténerek</a:t>
+            </a:r>
+          </a:p>
+          <a:p>
+            <a:r>
+              <a:rPr lang="hu-HU" dirty="0"/>
+              <a:t>Speciális és mobil konténerek</a:t>
+            </a:r>
+            <a:endParaRPr lang="hu-HU" dirty="0"/>
           </a:p>
         </p:txBody>
       </p:sp>
@@ -3372,9 +3725,99 @@
         <p:spPr/>
         <p:txBody>
           <a:bodyPr>
-            <a:normAutofit/>
+            <a:normAutofit lnSpcReduction="10000"/>
           </a:bodyPr>
           <a:lstStyle/>
+          <a:p>
+            <a:r>
+              <a:rPr lang="hu-HU" dirty="0"/>
+              <a:t>Első konténer = kamionos pótkocsikat kifejlesztő </a:t>
+            </a:r>
+            <a:r>
+              <a:rPr lang="hu-HU" dirty="0" err="1"/>
+              <a:t>Fruehauf</a:t>
+            </a:r>
+            <a:r>
+              <a:rPr lang="hu-HU" dirty="0"/>
+              <a:t> </a:t>
+            </a:r>
+            <a:r>
+              <a:rPr lang="hu-HU" dirty="0" err="1"/>
+              <a:t>Trailer</a:t>
+            </a:r>
+            <a:r>
+              <a:rPr lang="hu-HU" dirty="0"/>
+              <a:t> Corporation segítségével alkotta </a:t>
+            </a:r>
+            <a:r>
+              <a:rPr lang="hu-HU" dirty="0" smtClean="0"/>
+              <a:t>meg</a:t>
+            </a:r>
+          </a:p>
+          <a:p>
+            <a:r>
+              <a:rPr lang="hu-HU" dirty="0" err="1" smtClean="0"/>
+              <a:t>McLean</a:t>
+            </a:r>
+            <a:r>
+              <a:rPr lang="hu-HU" dirty="0" smtClean="0"/>
+              <a:t> családi benzinkút -&gt; könnyebb szállítmányozás célja</a:t>
+            </a:r>
+          </a:p>
+          <a:p>
+            <a:r>
+              <a:rPr lang="hu-HU" dirty="0" smtClean="0"/>
+              <a:t>Világháború után fontos lett a hatékonyság</a:t>
+            </a:r>
+          </a:p>
+          <a:p>
+            <a:r>
+              <a:rPr lang="hu-HU" dirty="0" smtClean="0"/>
+              <a:t>1955-ben vett tankhajót -&gt; konténer kompatibilis (58 konténer)</a:t>
+            </a:r>
+          </a:p>
+          <a:p>
+            <a:r>
+              <a:rPr lang="hu-HU" dirty="0" smtClean="0"/>
+              <a:t>Eladta a közúti céget, hajózási szállítmányozási céget megvette</a:t>
+            </a:r>
+          </a:p>
+          <a:p>
+            <a:r>
+              <a:rPr lang="hu-HU" dirty="0" err="1" smtClean="0"/>
+              <a:t>McLean</a:t>
+            </a:r>
+            <a:r>
+              <a:rPr lang="hu-HU" dirty="0" smtClean="0"/>
+              <a:t> nem </a:t>
+            </a:r>
+            <a:r>
+              <a:rPr lang="hu-HU" dirty="0" err="1" smtClean="0"/>
+              <a:t>védette</a:t>
+            </a:r>
+            <a:r>
+              <a:rPr lang="hu-HU" dirty="0" smtClean="0"/>
+              <a:t> le, ingyen hozzá férhető a fejlesztéshez</a:t>
+            </a:r>
+          </a:p>
+          <a:p>
+            <a:r>
+              <a:rPr lang="hu-HU" dirty="0" smtClean="0"/>
+              <a:t>1966ban első konténerkikötő New York</a:t>
+            </a:r>
+          </a:p>
+          <a:p>
+            <a:r>
+              <a:rPr lang="hu-HU" dirty="0" smtClean="0"/>
+              <a:t>Egyre több ilyen kikötő</a:t>
+            </a:r>
+          </a:p>
+          <a:p>
+            <a:endParaRPr lang="hu-HU" dirty="0" smtClean="0"/>
+          </a:p>
+          <a:p>
+            <a:endParaRPr lang="hu-HU" dirty="0" smtClean="0"/>
+          </a:p>
           <a:p>
             <a:endParaRPr lang="hu-HU" dirty="0"/>
           </a:p>
@@ -3448,7 +3891,37 @@
           <a:bodyPr/>
           <a:lstStyle/>
           <a:p>
-            <a:endParaRPr lang="hu-HU"/>
+            <a:r>
+              <a:rPr lang="hu-HU" dirty="0"/>
+              <a:t>Tengeri, áruszállító konténerek</a:t>
+            </a:r>
+          </a:p>
+          <a:p>
+            <a:r>
+              <a:rPr lang="hu-HU" dirty="0"/>
+              <a:t>Hűtőkonténerek</a:t>
+            </a:r>
+          </a:p>
+          <a:p>
+            <a:r>
+              <a:rPr lang="hu-HU" dirty="0"/>
+              <a:t>Tartálykonténerek</a:t>
+            </a:r>
+          </a:p>
+          <a:p>
+            <a:r>
+              <a:rPr lang="hu-HU" dirty="0"/>
+              <a:t>Irodakonténerek</a:t>
+            </a:r>
+          </a:p>
+          <a:p>
+            <a:r>
+              <a:rPr lang="hu-HU" dirty="0"/>
+              <a:t>Célkonténerek</a:t>
+            </a:r>
+          </a:p>
+          <a:p>
+            <a:endParaRPr lang="hu-HU" dirty="0"/>
           </a:p>
         </p:txBody>
       </p:sp>
@@ -3569,7 +4042,11 @@
           <a:bodyPr/>
           <a:lstStyle/>
           <a:p>
-            <a:endParaRPr lang="hu-HU"/>
+            <a:r>
+              <a:rPr lang="hu-HU" dirty="0" smtClean="0"/>
+              <a:t>Szállítás folyamata</a:t>
+            </a:r>
+            <a:endParaRPr lang="hu-HU" dirty="0"/>
           </a:p>
         </p:txBody>
       </p:sp>
@@ -3585,10 +4062,67 @@
         </p:nvSpPr>
         <p:spPr/>
         <p:txBody>
-          <a:bodyPr/>
-          <a:lstStyle/>
-          <a:p>
-            <a:endParaRPr lang="hu-HU"/>
+          <a:bodyPr>
+            <a:normAutofit fontScale="92500" lnSpcReduction="10000"/>
+          </a:bodyPr>
+          <a:lstStyle/>
+          <a:p>
+            <a:pPr fontAlgn="base"/>
+            <a:r>
+              <a:rPr lang="hu-HU" b="1" dirty="0"/>
+              <a:t>Áru előkészítése és csomagolása</a:t>
+            </a:r>
+            <a:r>
+              <a:rPr lang="hu-HU" dirty="0"/>
+              <a:t> – Az árut megfelelően be kell csomagolni, hogy ellenálljon a hosszú szállítási időnek és a rakodás során fellépő erőhatásoknak.</a:t>
+            </a:r>
+          </a:p>
+          <a:p>
+            <a:pPr fontAlgn="base"/>
+            <a:r>
+              <a:rPr lang="hu-HU" b="1" dirty="0"/>
+              <a:t>Konténer berakodása</a:t>
+            </a:r>
+            <a:r>
+              <a:rPr lang="hu-HU" dirty="0"/>
+              <a:t> – Az árukat a megfelelő típusú és méretű konténerbe helyezik, ügyelve az optimális helykihasználásra.</a:t>
+            </a:r>
+          </a:p>
+          <a:p>
+            <a:pPr fontAlgn="base"/>
+            <a:r>
+              <a:rPr lang="hu-HU" b="1" dirty="0"/>
+              <a:t>Szállítás a kikötőbe vagy terminálra</a:t>
+            </a:r>
+            <a:r>
+              <a:rPr lang="hu-HU" dirty="0"/>
+              <a:t> – A konténert teherautóval vagy vasúton eljuttatják a kikötőbe, ahol a hajókra való berakodás történik.</a:t>
+            </a:r>
+          </a:p>
+          <a:p>
+            <a:pPr fontAlgn="base"/>
+            <a:r>
+              <a:rPr lang="hu-HU" b="1" dirty="0"/>
+              <a:t>Tengeri vagy szárazföldi szállítás</a:t>
+            </a:r>
+            <a:r>
+              <a:rPr lang="hu-HU" dirty="0"/>
+              <a:t> – A konténer eljut a célországba vagy régióba, ahol az érkező terminálon ismét kirakodásra kerül.</a:t>
+            </a:r>
+          </a:p>
+          <a:p>
+            <a:pPr fontAlgn="base"/>
+            <a:r>
+              <a:rPr lang="hu-HU" b="1" dirty="0"/>
+              <a:t>Végső kiszállítás</a:t>
+            </a:r>
+            <a:r>
+              <a:rPr lang="hu-HU" dirty="0"/>
+              <a:t> – A konténeres árut eljuttatják a végső címzetthez teherautóval vagy vonattal.</a:t>
+            </a:r>
+          </a:p>
+          <a:p>
+            <a:endParaRPr lang="hu-HU" dirty="0"/>
           </a:p>
         </p:txBody>
       </p:sp>
@@ -3637,7 +4171,11 @@
           <a:bodyPr/>
           <a:lstStyle/>
           <a:p>
-            <a:endParaRPr lang="hu-HU"/>
+            <a:r>
+              <a:rPr lang="hu-HU" dirty="0" smtClean="0"/>
+              <a:t>Paritás használat</a:t>
+            </a:r>
+            <a:endParaRPr lang="hu-HU" dirty="0"/>
           </a:p>
         </p:txBody>
       </p:sp>
@@ -3656,7 +4194,100 @@
           <a:bodyPr/>
           <a:lstStyle/>
           <a:p>
-            <a:endParaRPr lang="hu-HU"/>
+            <a:r>
+              <a:rPr lang="hu-HU" dirty="0"/>
+              <a:t>FOB – Free </a:t>
+            </a:r>
+            <a:r>
+              <a:rPr lang="hu-HU" dirty="0" err="1"/>
+              <a:t>On</a:t>
+            </a:r>
+            <a:r>
+              <a:rPr lang="hu-HU" dirty="0"/>
+              <a:t> </a:t>
+            </a:r>
+            <a:r>
+              <a:rPr lang="hu-HU" dirty="0" err="1"/>
+              <a:t>Board</a:t>
+            </a:r>
+            <a:endParaRPr lang="hu-HU" dirty="0"/>
+          </a:p>
+          <a:p>
+            <a:r>
+              <a:rPr lang="hu-HU" dirty="0"/>
+              <a:t>FCA (Free </a:t>
+            </a:r>
+            <a:r>
+              <a:rPr lang="hu-HU" dirty="0" err="1"/>
+              <a:t>Carrier</a:t>
+            </a:r>
+            <a:r>
+              <a:rPr lang="hu-HU" dirty="0"/>
+              <a:t>)</a:t>
+            </a:r>
+          </a:p>
+          <a:p>
+            <a:r>
+              <a:rPr lang="hu-HU" dirty="0"/>
+              <a:t>DAP (</a:t>
+            </a:r>
+            <a:r>
+              <a:rPr lang="hu-HU" dirty="0" err="1"/>
+              <a:t>Delivered</a:t>
+            </a:r>
+            <a:r>
+              <a:rPr lang="hu-HU" dirty="0"/>
+              <a:t> </a:t>
+            </a:r>
+            <a:r>
+              <a:rPr lang="hu-HU" dirty="0" err="1"/>
+              <a:t>at</a:t>
+            </a:r>
+            <a:r>
+              <a:rPr lang="hu-HU" dirty="0"/>
+              <a:t> </a:t>
+            </a:r>
+            <a:r>
+              <a:rPr lang="hu-HU" dirty="0" err="1"/>
+              <a:t>Place</a:t>
+            </a:r>
+            <a:r>
+              <a:rPr lang="hu-HU" dirty="0"/>
+              <a:t>)</a:t>
+            </a:r>
+          </a:p>
+          <a:p>
+            <a:r>
+              <a:rPr lang="hu-HU" dirty="0"/>
+              <a:t>DDP (</a:t>
+            </a:r>
+            <a:r>
+              <a:rPr lang="hu-HU" dirty="0" err="1"/>
+              <a:t>Delivered</a:t>
+            </a:r>
+            <a:r>
+              <a:rPr lang="hu-HU" dirty="0"/>
+              <a:t> </a:t>
+            </a:r>
+            <a:r>
+              <a:rPr lang="hu-HU" dirty="0" err="1"/>
+              <a:t>Duty</a:t>
+            </a:r>
+            <a:r>
+              <a:rPr lang="hu-HU" dirty="0"/>
+              <a:t> </a:t>
+            </a:r>
+            <a:r>
+              <a:rPr lang="hu-HU" dirty="0" err="1"/>
+              <a:t>Paid</a:t>
+            </a:r>
+            <a:r>
+              <a:rPr lang="hu-HU" dirty="0"/>
+              <a:t>)</a:t>
+            </a:r>
+          </a:p>
+          <a:p>
+            <a:endParaRPr lang="hu-HU" dirty="0"/>
           </a:p>
         </p:txBody>
       </p:sp>
@@ -3705,7 +4336,11 @@
           <a:bodyPr/>
           <a:lstStyle/>
           <a:p>
-            <a:endParaRPr lang="hu-HU"/>
+            <a:r>
+              <a:rPr lang="hu-HU" dirty="0" smtClean="0"/>
+              <a:t>Előnyök</a:t>
+            </a:r>
+            <a:endParaRPr lang="hu-HU" dirty="0"/>
           </a:p>
         </p:txBody>
       </p:sp>
@@ -3721,10 +4356,71 @@
         </p:nvSpPr>
         <p:spPr/>
         <p:txBody>
-          <a:bodyPr/>
-          <a:lstStyle/>
-          <a:p>
-            <a:endParaRPr lang="hu-HU"/>
+          <a:bodyPr>
+            <a:normAutofit fontScale="92500" lnSpcReduction="10000"/>
+          </a:bodyPr>
+          <a:lstStyle/>
+          <a:p>
+            <a:pPr fontAlgn="base"/>
+            <a:r>
+              <a:rPr lang="hu-HU" b="1" dirty="0"/>
+              <a:t>Költséghatékony</a:t>
+            </a:r>
+            <a:r>
+              <a:rPr lang="hu-HU" dirty="0"/>
+              <a:t> – A tömeges áruszállítás révén csökkenti az egy egységre jutó szállítási költségeket.</a:t>
+            </a:r>
+          </a:p>
+          <a:p>
+            <a:pPr fontAlgn="base"/>
+            <a:r>
+              <a:rPr lang="hu-HU" b="1" dirty="0"/>
+              <a:t>Biztonságos</a:t>
+            </a:r>
+            <a:r>
+              <a:rPr lang="hu-HU" dirty="0"/>
+              <a:t> – A zárt konténerek védik az árut az időjárás viszontagságaitól, lopástól és sérülésektől.</a:t>
+            </a:r>
+          </a:p>
+          <a:p>
+            <a:pPr fontAlgn="base"/>
+            <a:r>
+              <a:rPr lang="hu-HU" b="1" dirty="0" err="1"/>
+              <a:t>Intermodális</a:t>
+            </a:r>
+            <a:r>
+              <a:rPr lang="hu-HU" b="1" dirty="0"/>
+              <a:t> szállítás</a:t>
+            </a:r>
+            <a:r>
+              <a:rPr lang="hu-HU" dirty="0"/>
+              <a:t> – A konténerek könnyen mozgathatók különböző szállítási módok között (hajó, vonat, teherautó), ami rugalmas és hatékony logisztikai megoldást biztosít.</a:t>
+            </a:r>
+          </a:p>
+          <a:p>
+            <a:pPr fontAlgn="base"/>
+            <a:r>
+              <a:rPr lang="hu-HU" b="1" dirty="0"/>
+              <a:t>Gyors és megbízható</a:t>
+            </a:r>
+            <a:r>
+              <a:rPr lang="hu-HU" dirty="0"/>
+              <a:t> – Az egységesített logisztikai folyamatok révén a szállítási idők előre meghatározhatók és pontosabbak.</a:t>
+            </a:r>
+          </a:p>
+          <a:p>
+            <a:pPr fontAlgn="base"/>
+            <a:r>
+              <a:rPr lang="hu-HU" b="1" dirty="0"/>
+              <a:t>Környezetbarát</a:t>
+            </a:r>
+            <a:r>
+              <a:rPr lang="hu-HU" dirty="0"/>
+              <a:t> – A hatékony rakodás és szállítás csökkenti az üzemanyag-fogyasztást és a károsanyag-kibocsátást.</a:t>
+            </a:r>
+          </a:p>
+          <a:p>
+            <a:endParaRPr lang="hu-HU" dirty="0"/>
           </a:p>
         </p:txBody>
       </p:sp>

--- a/Konténerek.pptx
+++ b/Konténerek.pptx
@@ -7,19 +7,20 @@
   <p:sldIdLst>
     <p:sldId id="256" r:id="rId2"/>
     <p:sldId id="257" r:id="rId3"/>
-    <p:sldId id="261" r:id="rId4"/>
+    <p:sldId id="274" r:id="rId4"/>
     <p:sldId id="258" r:id="rId5"/>
-    <p:sldId id="259" r:id="rId6"/>
-    <p:sldId id="260" r:id="rId7"/>
-    <p:sldId id="262" r:id="rId8"/>
-    <p:sldId id="263" r:id="rId9"/>
-    <p:sldId id="264" r:id="rId10"/>
-    <p:sldId id="265" r:id="rId11"/>
-    <p:sldId id="266" r:id="rId12"/>
-    <p:sldId id="267" r:id="rId13"/>
-    <p:sldId id="268" r:id="rId14"/>
-    <p:sldId id="269" r:id="rId15"/>
-    <p:sldId id="270" r:id="rId16"/>
+    <p:sldId id="261" r:id="rId6"/>
+    <p:sldId id="275" r:id="rId7"/>
+    <p:sldId id="276" r:id="rId8"/>
+    <p:sldId id="277" r:id="rId9"/>
+    <p:sldId id="259" r:id="rId10"/>
+    <p:sldId id="260" r:id="rId11"/>
+    <p:sldId id="262" r:id="rId12"/>
+    <p:sldId id="263" r:id="rId13"/>
+    <p:sldId id="264" r:id="rId14"/>
+    <p:sldId id="265" r:id="rId15"/>
+    <p:sldId id="267" r:id="rId16"/>
+    <p:sldId id="268" r:id="rId17"/>
   </p:sldIdLst>
   <p:sldSz cx="12192000" cy="6858000"/>
   <p:notesSz cx="6858000" cy="9144000"/>
@@ -257,7 +258,7 @@
           <a:p>
             <a:fld id="{8239ADAC-1920-48B6-9400-36527E1E2438}" type="datetimeFigureOut">
               <a:rPr lang="hu-HU" smtClean="0"/>
-              <a:t>2026. 03. 09.</a:t>
+              <a:t>2026. 03. 10.</a:t>
             </a:fld>
             <a:endParaRPr lang="hu-HU"/>
           </a:p>
@@ -427,7 +428,7 @@
           <a:p>
             <a:fld id="{8239ADAC-1920-48B6-9400-36527E1E2438}" type="datetimeFigureOut">
               <a:rPr lang="hu-HU" smtClean="0"/>
-              <a:t>2026. 03. 09.</a:t>
+              <a:t>2026. 03. 10.</a:t>
             </a:fld>
             <a:endParaRPr lang="hu-HU"/>
           </a:p>
@@ -607,7 +608,7 @@
           <a:p>
             <a:fld id="{8239ADAC-1920-48B6-9400-36527E1E2438}" type="datetimeFigureOut">
               <a:rPr lang="hu-HU" smtClean="0"/>
-              <a:t>2026. 03. 09.</a:t>
+              <a:t>2026. 03. 10.</a:t>
             </a:fld>
             <a:endParaRPr lang="hu-HU"/>
           </a:p>
@@ -777,7 +778,7 @@
           <a:p>
             <a:fld id="{8239ADAC-1920-48B6-9400-36527E1E2438}" type="datetimeFigureOut">
               <a:rPr lang="hu-HU" smtClean="0"/>
-              <a:t>2026. 03. 09.</a:t>
+              <a:t>2026. 03. 10.</a:t>
             </a:fld>
             <a:endParaRPr lang="hu-HU"/>
           </a:p>
@@ -1023,7 +1024,7 @@
           <a:p>
             <a:fld id="{8239ADAC-1920-48B6-9400-36527E1E2438}" type="datetimeFigureOut">
               <a:rPr lang="hu-HU" smtClean="0"/>
-              <a:t>2026. 03. 09.</a:t>
+              <a:t>2026. 03. 10.</a:t>
             </a:fld>
             <a:endParaRPr lang="hu-HU"/>
           </a:p>
@@ -1255,7 +1256,7 @@
           <a:p>
             <a:fld id="{8239ADAC-1920-48B6-9400-36527E1E2438}" type="datetimeFigureOut">
               <a:rPr lang="hu-HU" smtClean="0"/>
-              <a:t>2026. 03. 09.</a:t>
+              <a:t>2026. 03. 10.</a:t>
             </a:fld>
             <a:endParaRPr lang="hu-HU"/>
           </a:p>
@@ -1622,7 +1623,7 @@
           <a:p>
             <a:fld id="{8239ADAC-1920-48B6-9400-36527E1E2438}" type="datetimeFigureOut">
               <a:rPr lang="hu-HU" smtClean="0"/>
-              <a:t>2026. 03. 09.</a:t>
+              <a:t>2026. 03. 10.</a:t>
             </a:fld>
             <a:endParaRPr lang="hu-HU"/>
           </a:p>
@@ -1740,7 +1741,7 @@
           <a:p>
             <a:fld id="{8239ADAC-1920-48B6-9400-36527E1E2438}" type="datetimeFigureOut">
               <a:rPr lang="hu-HU" smtClean="0"/>
-              <a:t>2026. 03. 09.</a:t>
+              <a:t>2026. 03. 10.</a:t>
             </a:fld>
             <a:endParaRPr lang="hu-HU"/>
           </a:p>
@@ -1835,7 +1836,7 @@
           <a:p>
             <a:fld id="{8239ADAC-1920-48B6-9400-36527E1E2438}" type="datetimeFigureOut">
               <a:rPr lang="hu-HU" smtClean="0"/>
-              <a:t>2026. 03. 09.</a:t>
+              <a:t>2026. 03. 10.</a:t>
             </a:fld>
             <a:endParaRPr lang="hu-HU"/>
           </a:p>
@@ -2112,7 +2113,7 @@
           <a:p>
             <a:fld id="{8239ADAC-1920-48B6-9400-36527E1E2438}" type="datetimeFigureOut">
               <a:rPr lang="hu-HU" smtClean="0"/>
-              <a:t>2026. 03. 09.</a:t>
+              <a:t>2026. 03. 10.</a:t>
             </a:fld>
             <a:endParaRPr lang="hu-HU"/>
           </a:p>
@@ -2365,7 +2366,7 @@
           <a:p>
             <a:fld id="{8239ADAC-1920-48B6-9400-36527E1E2438}" type="datetimeFigureOut">
               <a:rPr lang="hu-HU" smtClean="0"/>
-              <a:t>2026. 03. 09.</a:t>
+              <a:t>2026. 03. 10.</a:t>
             </a:fld>
             <a:endParaRPr lang="hu-HU"/>
           </a:p>
@@ -2578,7 +2579,7 @@
           <a:p>
             <a:fld id="{8239ADAC-1920-48B6-9400-36527E1E2438}" type="datetimeFigureOut">
               <a:rPr lang="hu-HU" smtClean="0"/>
-              <a:t>2026. 03. 09.</a:t>
+              <a:t>2026. 03. 10.</a:t>
             </a:fld>
             <a:endParaRPr lang="hu-HU"/>
           </a:p>
@@ -3072,7 +3073,7 @@
           <a:p>
             <a:r>
               <a:rPr lang="hu-HU" dirty="0" smtClean="0"/>
-              <a:t>Mikor érdemes</a:t>
+              <a:t>Méretek</a:t>
             </a:r>
             <a:endParaRPr lang="hu-HU" dirty="0"/>
           </a:p>
@@ -3093,50 +3094,14 @@
           <a:bodyPr/>
           <a:lstStyle/>
           <a:p>
-            <a:pPr fontAlgn="base"/>
-            <a:r>
-              <a:rPr lang="hu-HU" dirty="0"/>
-              <a:t>Nagy mennyiségű árut kell messzi </a:t>
-            </a:r>
-            <a:r>
-              <a:rPr lang="hu-HU" dirty="0" err="1"/>
-              <a:t>uticélra</a:t>
-            </a:r>
-            <a:r>
-              <a:rPr lang="hu-HU" dirty="0"/>
-              <a:t> szállítani.</a:t>
-            </a:r>
-          </a:p>
-          <a:p>
-            <a:pPr fontAlgn="base"/>
-            <a:r>
-              <a:rPr lang="hu-HU" dirty="0"/>
-              <a:t>Fontos a rakomány biztonsága és védelme.</a:t>
-            </a:r>
-          </a:p>
-          <a:p>
-            <a:pPr fontAlgn="base"/>
-            <a:r>
-              <a:rPr lang="hu-HU" dirty="0"/>
-              <a:t>Költséghatékony megoldást keres a nemzetközi szállítmányozásra.</a:t>
-            </a:r>
-          </a:p>
-          <a:p>
-            <a:pPr fontAlgn="base"/>
-            <a:r>
-              <a:rPr lang="hu-HU" dirty="0"/>
-              <a:t>Rendszeres vagy ismétlődő szállításokra van szükség.</a:t>
-            </a:r>
-          </a:p>
-          <a:p>
-            <a:endParaRPr lang="hu-HU" dirty="0"/>
+            <a:endParaRPr lang="hu-HU"/>
           </a:p>
         </p:txBody>
       </p:sp>
     </p:spTree>
     <p:extLst>
       <p:ext uri="{BB962C8B-B14F-4D97-AF65-F5344CB8AC3E}">
-        <p14:creationId xmlns:p14="http://schemas.microsoft.com/office/powerpoint/2010/main" val="2445379354"/>
+        <p14:creationId xmlns:p14="http://schemas.microsoft.com/office/powerpoint/2010/main" val="617481146"/>
       </p:ext>
     </p:extLst>
   </p:cSld>
@@ -3180,7 +3145,15 @@
           <a:p>
             <a:r>
               <a:rPr lang="hu-HU" dirty="0" smtClean="0"/>
-              <a:t>Alkalmazási területek</a:t>
+              <a:t>Áru s</a:t>
+            </a:r>
+            <a:r>
+              <a:rPr lang="hu-HU" dirty="0" smtClean="0"/>
+              <a:t>zállítás </a:t>
+            </a:r>
+            <a:r>
+              <a:rPr lang="hu-HU" dirty="0" smtClean="0"/>
+              <a:t>folyamata</a:t>
             </a:r>
             <a:endParaRPr lang="hu-HU" dirty="0"/>
           </a:p>
@@ -3198,17 +3171,74 @@
         </p:nvSpPr>
         <p:spPr/>
         <p:txBody>
-          <a:bodyPr/>
-          <a:lstStyle/>
-          <a:p>
-            <a:endParaRPr lang="hu-HU"/>
+          <a:bodyPr>
+            <a:normAutofit fontScale="92500" lnSpcReduction="10000"/>
+          </a:bodyPr>
+          <a:lstStyle/>
+          <a:p>
+            <a:pPr fontAlgn="base"/>
+            <a:r>
+              <a:rPr lang="hu-HU" b="1" dirty="0"/>
+              <a:t>Áru előkészítése és csomagolása</a:t>
+            </a:r>
+            <a:r>
+              <a:rPr lang="hu-HU" dirty="0"/>
+              <a:t> – Az árut megfelelően be kell csomagolni, hogy ellenálljon a hosszú szállítási időnek és a rakodás során fellépő erőhatásoknak.</a:t>
+            </a:r>
+          </a:p>
+          <a:p>
+            <a:pPr fontAlgn="base"/>
+            <a:r>
+              <a:rPr lang="hu-HU" b="1" dirty="0"/>
+              <a:t>Konténer berakodása</a:t>
+            </a:r>
+            <a:r>
+              <a:rPr lang="hu-HU" dirty="0"/>
+              <a:t> – Az árukat a megfelelő típusú és méretű konténerbe helyezik, ügyelve az optimális helykihasználásra.</a:t>
+            </a:r>
+          </a:p>
+          <a:p>
+            <a:pPr fontAlgn="base"/>
+            <a:r>
+              <a:rPr lang="hu-HU" b="1" dirty="0"/>
+              <a:t>Szállítás a kikötőbe vagy terminálra</a:t>
+            </a:r>
+            <a:r>
+              <a:rPr lang="hu-HU" dirty="0"/>
+              <a:t> – A konténert teherautóval vagy vasúton eljuttatják a kikötőbe, ahol a hajókra való berakodás történik.</a:t>
+            </a:r>
+          </a:p>
+          <a:p>
+            <a:pPr fontAlgn="base"/>
+            <a:r>
+              <a:rPr lang="hu-HU" b="1" dirty="0"/>
+              <a:t>Tengeri vagy szárazföldi szállítás</a:t>
+            </a:r>
+            <a:r>
+              <a:rPr lang="hu-HU" dirty="0"/>
+              <a:t> – A konténer eljut a célországba vagy régióba, ahol az érkező terminálon ismét kirakodásra kerül.</a:t>
+            </a:r>
+          </a:p>
+          <a:p>
+            <a:pPr fontAlgn="base"/>
+            <a:r>
+              <a:rPr lang="hu-HU" b="1" dirty="0"/>
+              <a:t>Végső kiszállítás</a:t>
+            </a:r>
+            <a:r>
+              <a:rPr lang="hu-HU" dirty="0"/>
+              <a:t> – A konténeres árut eljuttatják a végső címzetthez teherautóval vagy vonattal.</a:t>
+            </a:r>
+          </a:p>
+          <a:p>
+            <a:endParaRPr lang="hu-HU" dirty="0"/>
           </a:p>
         </p:txBody>
       </p:sp>
     </p:spTree>
     <p:extLst>
       <p:ext uri="{BB962C8B-B14F-4D97-AF65-F5344CB8AC3E}">
-        <p14:creationId xmlns:p14="http://schemas.microsoft.com/office/powerpoint/2010/main" val="3638036783"/>
+        <p14:creationId xmlns:p14="http://schemas.microsoft.com/office/powerpoint/2010/main" val="3403460335"/>
       </p:ext>
     </p:extLst>
   </p:cSld>
@@ -3251,10 +3281,10 @@
           <a:lstStyle/>
           <a:p>
             <a:r>
-              <a:rPr lang="hu-HU" b="1"/>
-              <a:t> Mire figyeljen bérlés vagy vásárlás előtt?</a:t>
-            </a:r>
-            <a:endParaRPr lang="hu-HU"/>
+              <a:rPr lang="hu-HU" dirty="0" smtClean="0"/>
+              <a:t>Paritás használat</a:t>
+            </a:r>
+            <a:endParaRPr lang="hu-HU" dirty="0"/>
           </a:p>
         </p:txBody>
       </p:sp>
@@ -3273,14 +3303,107 @@
           <a:bodyPr/>
           <a:lstStyle/>
           <a:p>
-            <a:endParaRPr lang="hu-HU"/>
+            <a:r>
+              <a:rPr lang="hu-HU" dirty="0"/>
+              <a:t>FOB – Free </a:t>
+            </a:r>
+            <a:r>
+              <a:rPr lang="hu-HU" dirty="0" err="1"/>
+              <a:t>On</a:t>
+            </a:r>
+            <a:r>
+              <a:rPr lang="hu-HU" dirty="0"/>
+              <a:t> </a:t>
+            </a:r>
+            <a:r>
+              <a:rPr lang="hu-HU" dirty="0" err="1"/>
+              <a:t>Board</a:t>
+            </a:r>
+            <a:endParaRPr lang="hu-HU" dirty="0"/>
+          </a:p>
+          <a:p>
+            <a:r>
+              <a:rPr lang="hu-HU" dirty="0"/>
+              <a:t>FCA (Free </a:t>
+            </a:r>
+            <a:r>
+              <a:rPr lang="hu-HU" dirty="0" err="1"/>
+              <a:t>Carrier</a:t>
+            </a:r>
+            <a:r>
+              <a:rPr lang="hu-HU" dirty="0"/>
+              <a:t>)</a:t>
+            </a:r>
+          </a:p>
+          <a:p>
+            <a:r>
+              <a:rPr lang="hu-HU" dirty="0"/>
+              <a:t>DAP (</a:t>
+            </a:r>
+            <a:r>
+              <a:rPr lang="hu-HU" dirty="0" err="1"/>
+              <a:t>Delivered</a:t>
+            </a:r>
+            <a:r>
+              <a:rPr lang="hu-HU" dirty="0"/>
+              <a:t> </a:t>
+            </a:r>
+            <a:r>
+              <a:rPr lang="hu-HU" dirty="0" err="1"/>
+              <a:t>at</a:t>
+            </a:r>
+            <a:r>
+              <a:rPr lang="hu-HU" dirty="0"/>
+              <a:t> </a:t>
+            </a:r>
+            <a:r>
+              <a:rPr lang="hu-HU" dirty="0" err="1"/>
+              <a:t>Place</a:t>
+            </a:r>
+            <a:r>
+              <a:rPr lang="hu-HU" dirty="0"/>
+              <a:t>)</a:t>
+            </a:r>
+          </a:p>
+          <a:p>
+            <a:r>
+              <a:rPr lang="hu-HU" dirty="0"/>
+              <a:t>DDP (</a:t>
+            </a:r>
+            <a:r>
+              <a:rPr lang="hu-HU" dirty="0" err="1"/>
+              <a:t>Delivered</a:t>
+            </a:r>
+            <a:r>
+              <a:rPr lang="hu-HU" dirty="0"/>
+              <a:t> </a:t>
+            </a:r>
+            <a:r>
+              <a:rPr lang="hu-HU" dirty="0" err="1"/>
+              <a:t>Duty</a:t>
+            </a:r>
+            <a:r>
+              <a:rPr lang="hu-HU" dirty="0"/>
+              <a:t> </a:t>
+            </a:r>
+            <a:r>
+              <a:rPr lang="hu-HU" dirty="0" err="1"/>
+              <a:t>Paid</a:t>
+            </a:r>
+            <a:r>
+              <a:rPr lang="hu-HU" dirty="0"/>
+              <a:t>)</a:t>
+            </a:r>
+          </a:p>
+          <a:p>
+            <a:endParaRPr lang="hu-HU" dirty="0"/>
           </a:p>
         </p:txBody>
       </p:sp>
     </p:spTree>
     <p:extLst>
       <p:ext uri="{BB962C8B-B14F-4D97-AF65-F5344CB8AC3E}">
-        <p14:creationId xmlns:p14="http://schemas.microsoft.com/office/powerpoint/2010/main" val="3589918386"/>
+        <p14:creationId xmlns:p14="http://schemas.microsoft.com/office/powerpoint/2010/main" val="2351424428"/>
       </p:ext>
     </p:extLst>
   </p:cSld>
@@ -3322,7 +3445,11 @@
           <a:bodyPr/>
           <a:lstStyle/>
           <a:p>
-            <a:endParaRPr lang="hu-HU"/>
+            <a:r>
+              <a:rPr lang="hu-HU" dirty="0" smtClean="0"/>
+              <a:t>Előnyök</a:t>
+            </a:r>
+            <a:endParaRPr lang="hu-HU" dirty="0"/>
           </a:p>
         </p:txBody>
       </p:sp>
@@ -3338,17 +3465,78 @@
         </p:nvSpPr>
         <p:spPr/>
         <p:txBody>
-          <a:bodyPr/>
-          <a:lstStyle/>
-          <a:p>
-            <a:endParaRPr lang="hu-HU"/>
+          <a:bodyPr>
+            <a:normAutofit fontScale="92500" lnSpcReduction="10000"/>
+          </a:bodyPr>
+          <a:lstStyle/>
+          <a:p>
+            <a:pPr fontAlgn="base"/>
+            <a:r>
+              <a:rPr lang="hu-HU" b="1" dirty="0"/>
+              <a:t>Költséghatékony</a:t>
+            </a:r>
+            <a:r>
+              <a:rPr lang="hu-HU" dirty="0"/>
+              <a:t> – A tömeges áruszállítás révén csökkenti az egy egységre jutó szállítási költségeket.</a:t>
+            </a:r>
+          </a:p>
+          <a:p>
+            <a:pPr fontAlgn="base"/>
+            <a:r>
+              <a:rPr lang="hu-HU" b="1" dirty="0"/>
+              <a:t>Biztonságos</a:t>
+            </a:r>
+            <a:r>
+              <a:rPr lang="hu-HU" dirty="0"/>
+              <a:t> – A zárt konténerek védik az árut az időjárás viszontagságaitól, lopástól és sérülésektől.</a:t>
+            </a:r>
+          </a:p>
+          <a:p>
+            <a:pPr fontAlgn="base"/>
+            <a:r>
+              <a:rPr lang="hu-HU" b="1" dirty="0" err="1"/>
+              <a:t>Intermodális</a:t>
+            </a:r>
+            <a:r>
+              <a:rPr lang="hu-HU" b="1" dirty="0"/>
+              <a:t> szállítás</a:t>
+            </a:r>
+            <a:r>
+              <a:rPr lang="hu-HU" dirty="0"/>
+              <a:t> – A konténerek könnyen mozgathatók különböző szállítási módok között (hajó, vonat, teherautó), ami rugalmas és hatékony logisztikai megoldást biztosít.</a:t>
+            </a:r>
+          </a:p>
+          <a:p>
+            <a:pPr fontAlgn="base"/>
+            <a:r>
+              <a:rPr lang="hu-HU" b="1" dirty="0"/>
+              <a:t>Gyors és megbízható</a:t>
+            </a:r>
+            <a:r>
+              <a:rPr lang="hu-HU" dirty="0"/>
+              <a:t> – Az egységesített logisztikai folyamatok révén a szállítási idők előre meghatározhatók és pontosabbak.</a:t>
+            </a:r>
+          </a:p>
+          <a:p>
+            <a:pPr fontAlgn="base"/>
+            <a:r>
+              <a:rPr lang="hu-HU" b="1" dirty="0"/>
+              <a:t>Környezetbarát</a:t>
+            </a:r>
+            <a:r>
+              <a:rPr lang="hu-HU" dirty="0"/>
+              <a:t> – A hatékony rakodás és szállítás csökkenti az üzemanyag-fogyasztást és a károsanyag-kibocsátást.</a:t>
+            </a:r>
+          </a:p>
+          <a:p>
+            <a:endParaRPr lang="hu-HU" dirty="0"/>
           </a:p>
         </p:txBody>
       </p:sp>
     </p:spTree>
     <p:extLst>
       <p:ext uri="{BB962C8B-B14F-4D97-AF65-F5344CB8AC3E}">
-        <p14:creationId xmlns:p14="http://schemas.microsoft.com/office/powerpoint/2010/main" val="3480588263"/>
+        <p14:creationId xmlns:p14="http://schemas.microsoft.com/office/powerpoint/2010/main" val="3249197787"/>
       </p:ext>
     </p:extLst>
   </p:cSld>
@@ -3390,7 +3578,11 @@
           <a:bodyPr/>
           <a:lstStyle/>
           <a:p>
-            <a:endParaRPr lang="hu-HU"/>
+            <a:r>
+              <a:rPr lang="hu-HU" dirty="0" smtClean="0"/>
+              <a:t>Mikor érdemes</a:t>
+            </a:r>
+            <a:endParaRPr lang="hu-HU" dirty="0"/>
           </a:p>
         </p:txBody>
       </p:sp>
@@ -3409,14 +3601,50 @@
           <a:bodyPr/>
           <a:lstStyle/>
           <a:p>
-            <a:endParaRPr lang="hu-HU"/>
+            <a:pPr fontAlgn="base"/>
+            <a:r>
+              <a:rPr lang="hu-HU" dirty="0"/>
+              <a:t>Nagy mennyiségű árut kell messzi </a:t>
+            </a:r>
+            <a:r>
+              <a:rPr lang="hu-HU" dirty="0" err="1"/>
+              <a:t>uticélra</a:t>
+            </a:r>
+            <a:r>
+              <a:rPr lang="hu-HU" dirty="0"/>
+              <a:t> szállítani.</a:t>
+            </a:r>
+          </a:p>
+          <a:p>
+            <a:pPr fontAlgn="base"/>
+            <a:r>
+              <a:rPr lang="hu-HU" dirty="0"/>
+              <a:t>Fontos a rakomány biztonsága és védelme.</a:t>
+            </a:r>
+          </a:p>
+          <a:p>
+            <a:pPr fontAlgn="base"/>
+            <a:r>
+              <a:rPr lang="hu-HU" dirty="0"/>
+              <a:t>Költséghatékony megoldást keres a nemzetközi szállítmányozásra.</a:t>
+            </a:r>
+          </a:p>
+          <a:p>
+            <a:pPr fontAlgn="base"/>
+            <a:r>
+              <a:rPr lang="hu-HU" dirty="0"/>
+              <a:t>Rendszeres vagy ismétlődő szállításokra van szükség.</a:t>
+            </a:r>
+          </a:p>
+          <a:p>
+            <a:endParaRPr lang="hu-HU" dirty="0"/>
           </a:p>
         </p:txBody>
       </p:sp>
     </p:spTree>
     <p:extLst>
       <p:ext uri="{BB962C8B-B14F-4D97-AF65-F5344CB8AC3E}">
-        <p14:creationId xmlns:p14="http://schemas.microsoft.com/office/powerpoint/2010/main" val="2662588212"/>
+        <p14:creationId xmlns:p14="http://schemas.microsoft.com/office/powerpoint/2010/main" val="2445379354"/>
       </p:ext>
     </p:extLst>
   </p:cSld>
@@ -3458,6 +3686,10 @@
           <a:bodyPr/>
           <a:lstStyle/>
           <a:p>
+            <a:r>
+              <a:rPr lang="hu-HU" b="1"/>
+              <a:t> Mire figyeljen bérlés vagy vásárlás előtt?</a:t>
+            </a:r>
             <a:endParaRPr lang="hu-HU"/>
           </a:p>
         </p:txBody>
@@ -3484,7 +3716,83 @@
     </p:spTree>
     <p:extLst>
       <p:ext uri="{BB962C8B-B14F-4D97-AF65-F5344CB8AC3E}">
-        <p14:creationId xmlns:p14="http://schemas.microsoft.com/office/powerpoint/2010/main" val="2102790198"/>
+        <p14:creationId xmlns:p14="http://schemas.microsoft.com/office/powerpoint/2010/main" val="3589918386"/>
+      </p:ext>
+    </p:extLst>
+  </p:cSld>
+  <p:clrMapOvr>
+    <a:masterClrMapping/>
+  </p:clrMapOvr>
+</p:sld>
+</file>
+
+<file path=ppt/slides/slide16.xml><?xml version="1.0" encoding="utf-8"?>
+<p:sld xmlns:a="http://schemas.openxmlformats.org/drawingml/2006/main" xmlns:r="http://schemas.openxmlformats.org/officeDocument/2006/relationships" xmlns:p="http://schemas.openxmlformats.org/presentationml/2006/main">
+  <p:cSld>
+    <p:spTree>
+      <p:nvGrpSpPr>
+        <p:cNvPr id="1" name=""/>
+        <p:cNvGrpSpPr/>
+        <p:nvPr/>
+      </p:nvGrpSpPr>
+      <p:grpSpPr>
+        <a:xfrm>
+          <a:off x="0" y="0"/>
+          <a:ext cx="0" cy="0"/>
+          <a:chOff x="0" y="0"/>
+          <a:chExt cx="0" cy="0"/>
+        </a:xfrm>
+      </p:grpSpPr>
+      <p:sp>
+        <p:nvSpPr>
+          <p:cNvPr id="2" name="Cím 1"/>
+          <p:cNvSpPr>
+            <a:spLocks noGrp="1"/>
+          </p:cNvSpPr>
+          <p:nvPr>
+            <p:ph type="title"/>
+          </p:nvPr>
+        </p:nvSpPr>
+        <p:spPr/>
+        <p:txBody>
+          <a:bodyPr/>
+          <a:lstStyle/>
+          <a:p>
+            <a:r>
+              <a:rPr lang="hu-HU" b="1" dirty="0"/>
+              <a:t>K</a:t>
+            </a:r>
+            <a:r>
+              <a:rPr lang="hu-HU" b="1" dirty="0" smtClean="0"/>
+              <a:t>onténerbiztonság</a:t>
+            </a:r>
+            <a:endParaRPr lang="hu-HU" dirty="0"/>
+          </a:p>
+        </p:txBody>
+      </p:sp>
+      <p:sp>
+        <p:nvSpPr>
+          <p:cNvPr id="3" name="Tartalom helye 2"/>
+          <p:cNvSpPr>
+            <a:spLocks noGrp="1"/>
+          </p:cNvSpPr>
+          <p:nvPr>
+            <p:ph idx="1"/>
+          </p:nvPr>
+        </p:nvSpPr>
+        <p:spPr/>
+        <p:txBody>
+          <a:bodyPr/>
+          <a:lstStyle/>
+          <a:p>
+            <a:endParaRPr lang="hu-HU"/>
+          </a:p>
+        </p:txBody>
+      </p:sp>
+    </p:spTree>
+    <p:extLst>
+      <p:ext uri="{BB962C8B-B14F-4D97-AF65-F5344CB8AC3E}">
+        <p14:creationId xmlns:p14="http://schemas.microsoft.com/office/powerpoint/2010/main" val="3480588263"/>
       </p:ext>
     </p:extLst>
   </p:cSld>
@@ -3528,7 +3836,11 @@
           <a:p>
             <a:r>
               <a:rPr lang="hu-HU" dirty="0" smtClean="0"/>
-              <a:t>Mi az a konténer?</a:t>
+              <a:t>Mi az a konténer</a:t>
+            </a:r>
+            <a:r>
+              <a:rPr lang="hu-HU" dirty="0" smtClean="0"/>
+              <a:t>? </a:t>
             </a:r>
             <a:endParaRPr lang="hu-HU" dirty="0"/>
           </a:p>
@@ -3536,30 +3848,156 @@
       </p:sp>
       <p:sp>
         <p:nvSpPr>
-          <p:cNvPr id="3" name="Tartalom helye 2"/>
-          <p:cNvSpPr>
-            <a:spLocks noGrp="1"/>
+          <p:cNvPr id="5" name="Rectangle 2"/>
+          <p:cNvSpPr>
+            <a:spLocks noGrp="1" noChangeArrowheads="1"/>
           </p:cNvSpPr>
           <p:nvPr>
             <p:ph idx="1"/>
           </p:nvPr>
         </p:nvSpPr>
-        <p:spPr/>
-        <p:txBody>
-          <a:bodyPr/>
-          <a:lstStyle/>
-          <a:p>
+        <p:spPr bwMode="auto">
+          <a:xfrm>
+            <a:off x="1138646" y="2139448"/>
+            <a:ext cx="8880566" cy="2246769"/>
+          </a:xfrm>
+          <a:prstGeom prst="rect">
+            <a:avLst/>
+          </a:prstGeom>
+          <a:noFill/>
+          <a:ln>
+            <a:noFill/>
+          </a:ln>
+          <a:effectLst/>
+          <a:extLst>
+            <a:ext uri="{909E8E84-426E-40DD-AFC4-6F175D3DCCD1}">
+              <a14:hiddenFill xmlns:a14="http://schemas.microsoft.com/office/drawing/2010/main">
+                <a:solidFill>
+                  <a:schemeClr val="accent1"/>
+                </a:solidFill>
+              </a14:hiddenFill>
+            </a:ext>
+            <a:ext uri="{91240B29-F687-4F45-9708-019B960494DF}">
+              <a14:hiddenLine xmlns:a14="http://schemas.microsoft.com/office/drawing/2010/main" w="9525">
+                <a:solidFill>
+                  <a:schemeClr val="tx1"/>
+                </a:solidFill>
+                <a:miter lim="800000"/>
+                <a:headEnd/>
+                <a:tailEnd/>
+              </a14:hiddenLine>
+            </a:ext>
+            <a:ext uri="{AF507438-7753-43E0-B8FC-AC1667EBCBE1}">
+              <a14:hiddenEffects xmlns:a14="http://schemas.microsoft.com/office/drawing/2010/main">
+                <a:effectLst>
+                  <a:outerShdw dist="35921" dir="2700000" algn="ctr" rotWithShape="0">
+                    <a:schemeClr val="bg2"/>
+                  </a:outerShdw>
+                </a:effectLst>
+              </a14:hiddenEffects>
+            </a:ext>
+          </a:extLst>
+        </p:spPr>
+        <p:txBody>
+          <a:bodyPr vert="horz" wrap="square" lIns="91440" tIns="45720" rIns="91440" bIns="45720" numCol="1" anchor="ctr" anchorCtr="0" compatLnSpc="1">
+            <a:prstTxWarp prst="textNoShape">
+              <a:avLst/>
+            </a:prstTxWarp>
+            <a:spAutoFit/>
+          </a:bodyPr>
+          <a:lstStyle/>
+          <a:p>
+            <a:pPr marL="0" lvl="0" indent="0" eaLnBrk="0" fontAlgn="base" hangingPunct="0">
+              <a:lnSpc>
+                <a:spcPct val="100000"/>
+              </a:lnSpc>
+              <a:spcBef>
+                <a:spcPct val="0"/>
+              </a:spcBef>
+              <a:spcAft>
+                <a:spcPct val="0"/>
+              </a:spcAft>
+              <a:buFontTx/>
+              <a:buChar char="•"/>
+            </a:pPr>
             <a:r>
               <a:rPr lang="hu-HU" dirty="0" smtClean="0"/>
-              <a:t>Mire használjuk</a:t>
-            </a:r>
-          </a:p>
-          <a:p>
+              <a:t>Szállító és tárolóegység vagy lakó „épület”</a:t>
+            </a:r>
+          </a:p>
+          <a:p>
+            <a:pPr marL="0" lvl="0" indent="0" eaLnBrk="0" fontAlgn="base" hangingPunct="0">
+              <a:lnSpc>
+                <a:spcPct val="100000"/>
+              </a:lnSpc>
+              <a:spcBef>
+                <a:spcPct val="0"/>
+              </a:spcBef>
+              <a:spcAft>
+                <a:spcPct val="0"/>
+              </a:spcAft>
+              <a:buFontTx/>
+              <a:buChar char="•"/>
+            </a:pPr>
             <a:r>
               <a:rPr lang="hu-HU" dirty="0" smtClean="0"/>
-              <a:t>Hol használjuk</a:t>
-            </a:r>
-            <a:endParaRPr lang="hu-HU" dirty="0"/>
+              <a:t>Fém, műanyag, fa, </a:t>
+            </a:r>
+            <a:r>
+              <a:rPr lang="hu-HU" dirty="0"/>
+              <a:t>k</a:t>
+            </a:r>
+            <a:r>
+              <a:rPr lang="hu-HU" dirty="0" smtClean="0"/>
+              <a:t>ompozit </a:t>
+            </a:r>
+            <a:r>
+              <a:rPr lang="hu-HU" dirty="0"/>
+              <a:t>és szigetelő </a:t>
+            </a:r>
+            <a:r>
+              <a:rPr lang="hu-HU" dirty="0" smtClean="0"/>
+              <a:t>anyagokból készül</a:t>
+            </a:r>
+          </a:p>
+          <a:p>
+            <a:pPr marL="0" lvl="0" indent="0" eaLnBrk="0" fontAlgn="base" hangingPunct="0">
+              <a:lnSpc>
+                <a:spcPct val="100000"/>
+              </a:lnSpc>
+              <a:spcBef>
+                <a:spcPct val="0"/>
+              </a:spcBef>
+              <a:spcAft>
+                <a:spcPct val="0"/>
+              </a:spcAft>
+              <a:buFontTx/>
+              <a:buChar char="•"/>
+            </a:pPr>
+            <a:r>
+              <a:rPr lang="hu-HU" dirty="0" smtClean="0"/>
+              <a:t>Szabványos méret miatt könnyű a mozgatás</a:t>
+            </a:r>
+          </a:p>
+          <a:p>
+            <a:pPr marL="0" lvl="0" indent="0" eaLnBrk="0" fontAlgn="base" hangingPunct="0">
+              <a:lnSpc>
+                <a:spcPct val="100000"/>
+              </a:lnSpc>
+              <a:spcBef>
+                <a:spcPct val="0"/>
+              </a:spcBef>
+              <a:spcAft>
+                <a:spcPct val="0"/>
+              </a:spcAft>
+              <a:buFontTx/>
+              <a:buChar char="•"/>
+            </a:pPr>
+            <a:r>
+              <a:rPr lang="hu-HU" dirty="0"/>
+              <a:t>A modern nemzetközi áruszállítás egyik legfontosabb eszköze.</a:t>
+            </a:r>
+            <a:endParaRPr lang="hu-HU" dirty="0" smtClean="0"/>
           </a:p>
         </p:txBody>
       </p:sp>
@@ -3610,7 +4048,7 @@
           <a:p>
             <a:r>
               <a:rPr lang="hu-HU" dirty="0" smtClean="0"/>
-              <a:t>3 fő típus</a:t>
+              <a:t>Mire és mikor használjuk?</a:t>
             </a:r>
             <a:endParaRPr lang="hu-HU" dirty="0"/>
           </a:p>
@@ -3631,30 +4069,198 @@
           <a:bodyPr/>
           <a:lstStyle/>
           <a:p>
-            <a:r>
-              <a:rPr lang="hu-HU" dirty="0"/>
-              <a:t>Tengeri és szállítmányozási konténerek (ISO szabvány</a:t>
-            </a:r>
-            <a:r>
-              <a:rPr lang="hu-HU" dirty="0" smtClean="0"/>
-              <a:t>)</a:t>
-            </a:r>
-          </a:p>
-          <a:p>
-            <a:r>
-              <a:rPr lang="hu-HU" dirty="0"/>
-              <a:t>Hulladékszállító (sittes) </a:t>
-            </a:r>
-            <a:r>
-              <a:rPr lang="hu-HU" dirty="0" smtClean="0"/>
-              <a:t>konténerek</a:t>
-            </a:r>
-          </a:p>
-          <a:p>
-            <a:r>
-              <a:rPr lang="hu-HU" dirty="0"/>
-              <a:t>Speciális és mobil konténerek</a:t>
-            </a:r>
+            <a:pPr marL="0" lvl="0" indent="0" eaLnBrk="0" fontAlgn="base" hangingPunct="0">
+              <a:lnSpc>
+                <a:spcPct val="100000"/>
+              </a:lnSpc>
+              <a:spcBef>
+                <a:spcPct val="0"/>
+              </a:spcBef>
+              <a:spcAft>
+                <a:spcPct val="0"/>
+              </a:spcAft>
+              <a:buFontTx/>
+              <a:buChar char="•"/>
+            </a:pPr>
+            <a:r>
+              <a:rPr lang="hu-HU" altLang="hu-HU" dirty="0">
+                <a:latin typeface="Arial" panose="020B0604020202020204" pitchFamily="34" charset="0"/>
+              </a:rPr>
+              <a:t>Árucikkek szállítására nagy távolságokra</a:t>
+            </a:r>
+          </a:p>
+          <a:p>
+            <a:pPr marL="0" lvl="0" indent="0" eaLnBrk="0" fontAlgn="base" hangingPunct="0">
+              <a:lnSpc>
+                <a:spcPct val="100000"/>
+              </a:lnSpc>
+              <a:spcBef>
+                <a:spcPct val="0"/>
+              </a:spcBef>
+              <a:spcAft>
+                <a:spcPct val="0"/>
+              </a:spcAft>
+              <a:buFontTx/>
+              <a:buChar char="•"/>
+            </a:pPr>
+            <a:r>
+              <a:rPr lang="hu-HU" altLang="hu-HU" dirty="0">
+                <a:latin typeface="Arial" panose="020B0604020202020204" pitchFamily="34" charset="0"/>
+              </a:rPr>
+              <a:t>Nemzetközi kereskedelemben áruszállításra</a:t>
+            </a:r>
+          </a:p>
+          <a:p>
+            <a:pPr marL="0" lvl="0" indent="0" eaLnBrk="0" fontAlgn="base" hangingPunct="0">
+              <a:lnSpc>
+                <a:spcPct val="100000"/>
+              </a:lnSpc>
+              <a:spcBef>
+                <a:spcPct val="0"/>
+              </a:spcBef>
+              <a:spcAft>
+                <a:spcPct val="0"/>
+              </a:spcAft>
+              <a:buFontTx/>
+              <a:buChar char="•"/>
+            </a:pPr>
+            <a:r>
+              <a:rPr lang="hu-HU" altLang="hu-HU" dirty="0">
+                <a:latin typeface="Arial" panose="020B0604020202020204" pitchFamily="34" charset="0"/>
+              </a:rPr>
+              <a:t>Raktározásra és ideiglenes tárolásra</a:t>
+            </a:r>
+          </a:p>
+          <a:p>
+            <a:pPr marL="0" lvl="0" indent="0" eaLnBrk="0" fontAlgn="base" hangingPunct="0">
+              <a:lnSpc>
+                <a:spcPct val="100000"/>
+              </a:lnSpc>
+              <a:spcBef>
+                <a:spcPct val="0"/>
+              </a:spcBef>
+              <a:spcAft>
+                <a:spcPct val="0"/>
+              </a:spcAft>
+              <a:buFontTx/>
+              <a:buChar char="•"/>
+            </a:pPr>
+            <a:r>
+              <a:rPr lang="hu-HU" altLang="hu-HU" dirty="0">
+                <a:latin typeface="Arial" panose="020B0604020202020204" pitchFamily="34" charset="0"/>
+              </a:rPr>
+              <a:t>Építkezéseken (pl. sittes konténer)</a:t>
+            </a:r>
+          </a:p>
+          <a:p>
+            <a:pPr marL="0" lvl="0" indent="0" eaLnBrk="0" fontAlgn="base" hangingPunct="0">
+              <a:lnSpc>
+                <a:spcPct val="100000"/>
+              </a:lnSpc>
+              <a:spcBef>
+                <a:spcPct val="0"/>
+              </a:spcBef>
+              <a:spcAft>
+                <a:spcPct val="0"/>
+              </a:spcAft>
+              <a:buFontTx/>
+              <a:buChar char="•"/>
+            </a:pPr>
+            <a:r>
+              <a:rPr lang="hu-HU" altLang="hu-HU" dirty="0">
+                <a:latin typeface="Arial" panose="020B0604020202020204" pitchFamily="34" charset="0"/>
+              </a:rPr>
+              <a:t>Ideiglenes irodák vagy lakókonténerek kialakítására</a:t>
+            </a:r>
+          </a:p>
+          <a:p>
+            <a:pPr eaLnBrk="0" fontAlgn="base" hangingPunct="0">
+              <a:spcBef>
+                <a:spcPct val="0"/>
+              </a:spcBef>
+              <a:spcAft>
+                <a:spcPct val="0"/>
+              </a:spcAft>
+              <a:buFontTx/>
+              <a:buChar char="•"/>
+            </a:pPr>
+            <a:r>
+              <a:rPr lang="hu-HU" altLang="hu-HU" dirty="0">
+                <a:latin typeface="Arial" panose="020B0604020202020204" pitchFamily="34" charset="0"/>
+              </a:rPr>
+              <a:t>Ha fontos az áru biztonsága és </a:t>
+            </a:r>
+            <a:r>
+              <a:rPr lang="hu-HU" altLang="hu-HU" dirty="0" smtClean="0">
+                <a:latin typeface="Arial" panose="020B0604020202020204" pitchFamily="34" charset="0"/>
+              </a:rPr>
+              <a:t>védelme</a:t>
+            </a:r>
+            <a:endParaRPr lang="hu-HU" altLang="hu-HU" dirty="0">
+              <a:latin typeface="Arial" panose="020B0604020202020204" pitchFamily="34" charset="0"/>
+            </a:endParaRPr>
+          </a:p>
+          <a:p>
+            <a:pPr eaLnBrk="0" fontAlgn="base" hangingPunct="0">
+              <a:spcBef>
+                <a:spcPct val="0"/>
+              </a:spcBef>
+              <a:spcAft>
+                <a:spcPct val="0"/>
+              </a:spcAft>
+              <a:buFontTx/>
+              <a:buChar char="•"/>
+            </a:pPr>
+            <a:r>
+              <a:rPr lang="hu-HU" altLang="hu-HU" dirty="0">
+                <a:latin typeface="Arial" panose="020B0604020202020204" pitchFamily="34" charset="0"/>
+              </a:rPr>
+              <a:t>Ha nagy mennyiségű árut kell szállítani</a:t>
+            </a:r>
+          </a:p>
+          <a:p>
+            <a:pPr marL="0" lvl="0" indent="0" eaLnBrk="0" fontAlgn="base" hangingPunct="0">
+              <a:lnSpc>
+                <a:spcPct val="100000"/>
+              </a:lnSpc>
+              <a:spcBef>
+                <a:spcPct val="0"/>
+              </a:spcBef>
+              <a:spcAft>
+                <a:spcPct val="0"/>
+              </a:spcAft>
+              <a:buFontTx/>
+              <a:buChar char="•"/>
+            </a:pPr>
+            <a:r>
+              <a:rPr lang="hu-HU" altLang="hu-HU" dirty="0">
+                <a:latin typeface="Arial" panose="020B0604020202020204" pitchFamily="34" charset="0"/>
+              </a:rPr>
+              <a:t>Nemzetközi vagy hosszú távú szállításnál</a:t>
+            </a:r>
+          </a:p>
+          <a:p>
+            <a:pPr marL="0" lvl="0" indent="0" eaLnBrk="0" fontAlgn="base" hangingPunct="0">
+              <a:lnSpc>
+                <a:spcPct val="100000"/>
+              </a:lnSpc>
+              <a:spcBef>
+                <a:spcPct val="0"/>
+              </a:spcBef>
+              <a:spcAft>
+                <a:spcPct val="0"/>
+              </a:spcAft>
+              <a:buFontTx/>
+              <a:buChar char="•"/>
+            </a:pPr>
+            <a:r>
+              <a:rPr lang="hu-HU" altLang="hu-HU" dirty="0">
+                <a:latin typeface="Arial" panose="020B0604020202020204" pitchFamily="34" charset="0"/>
+              </a:rPr>
+              <a:t>Ha több szállítási módot (hajó, vonat, kamion) kombinálnak.</a:t>
+            </a:r>
+          </a:p>
+          <a:p>
             <a:endParaRPr lang="hu-HU" dirty="0"/>
           </a:p>
         </p:txBody>
@@ -3662,7 +4268,7 @@
     </p:spTree>
     <p:extLst>
       <p:ext uri="{BB962C8B-B14F-4D97-AF65-F5344CB8AC3E}">
-        <p14:creationId xmlns:p14="http://schemas.microsoft.com/office/powerpoint/2010/main" val="3986370717"/>
+        <p14:creationId xmlns:p14="http://schemas.microsoft.com/office/powerpoint/2010/main" val="243937159"/>
       </p:ext>
     </p:extLst>
   </p:cSld>
@@ -3870,7 +4476,7 @@
           <a:p>
             <a:r>
               <a:rPr lang="hu-HU" dirty="0" smtClean="0"/>
-              <a:t>Típusok(felhasználási típus)</a:t>
+              <a:t>3 fő típus</a:t>
             </a:r>
             <a:endParaRPr lang="hu-HU" dirty="0"/>
           </a:p>
@@ -3893,42 +4499,35 @@
           <a:p>
             <a:r>
               <a:rPr lang="hu-HU" dirty="0"/>
-              <a:t>Tengeri, áruszállító konténerek</a:t>
-            </a:r>
-          </a:p>
-          <a:p>
-            <a:r>
-              <a:rPr lang="hu-HU" dirty="0"/>
-              <a:t>Hűtőkonténerek</a:t>
-            </a:r>
-          </a:p>
-          <a:p>
-            <a:r>
-              <a:rPr lang="hu-HU" dirty="0"/>
-              <a:t>Tartálykonténerek</a:t>
-            </a:r>
-          </a:p>
-          <a:p>
-            <a:r>
-              <a:rPr lang="hu-HU" dirty="0"/>
-              <a:t>Irodakonténerek</a:t>
-            </a:r>
-          </a:p>
-          <a:p>
-            <a:r>
-              <a:rPr lang="hu-HU" dirty="0"/>
-              <a:t>Célkonténerek</a:t>
-            </a:r>
-          </a:p>
-          <a:p>
-            <a:endParaRPr lang="hu-HU" dirty="0"/>
+              <a:t>Tengeri és szállítmányozási konténerek (ISO szabvány</a:t>
+            </a:r>
+            <a:r>
+              <a:rPr lang="hu-HU" dirty="0" smtClean="0"/>
+              <a:t>)</a:t>
+            </a:r>
+          </a:p>
+          <a:p>
+            <a:r>
+              <a:rPr lang="hu-HU" dirty="0"/>
+              <a:t>Hulladékszállító (sittes) </a:t>
+            </a:r>
+            <a:r>
+              <a:rPr lang="hu-HU" dirty="0" smtClean="0"/>
+              <a:t>konténerek</a:t>
+            </a:r>
+          </a:p>
+          <a:p>
+            <a:r>
+              <a:rPr lang="hu-HU" dirty="0"/>
+              <a:t>Speciális és mobil konténerek</a:t>
+            </a:r>
           </a:p>
         </p:txBody>
       </p:sp>
     </p:spTree>
     <p:extLst>
       <p:ext uri="{BB962C8B-B14F-4D97-AF65-F5344CB8AC3E}">
-        <p14:creationId xmlns:p14="http://schemas.microsoft.com/office/powerpoint/2010/main" val="3034692917"/>
+        <p14:creationId xmlns:p14="http://schemas.microsoft.com/office/powerpoint/2010/main" val="3986370717"/>
       </p:ext>
     </p:extLst>
   </p:cSld>
@@ -3967,12 +4566,14 @@
         </p:nvSpPr>
         <p:spPr/>
         <p:txBody>
-          <a:bodyPr/>
+          <a:bodyPr>
+            <a:normAutofit/>
+          </a:bodyPr>
           <a:lstStyle/>
           <a:p>
             <a:r>
               <a:rPr lang="hu-HU" dirty="0" smtClean="0"/>
-              <a:t>Méretek</a:t>
+              <a:t>Tengeri és szállítmányozási konténerek (ISO szabvány)</a:t>
             </a:r>
             <a:endParaRPr lang="hu-HU" dirty="0"/>
           </a:p>
@@ -3980,7 +4581,7 @@
       </p:sp>
       <p:sp>
         <p:nvSpPr>
-          <p:cNvPr id="3" name="Tartalom helye 2"/>
+          <p:cNvPr id="5" name="Tartalom helye 4"/>
           <p:cNvSpPr>
             <a:spLocks noGrp="1"/>
           </p:cNvSpPr>
@@ -3993,14 +4594,14 @@
           <a:bodyPr/>
           <a:lstStyle/>
           <a:p>
-            <a:endParaRPr lang="hu-HU"/>
+            <a:endParaRPr lang="hu-HU" dirty="0"/>
           </a:p>
         </p:txBody>
       </p:sp>
     </p:spTree>
     <p:extLst>
       <p:ext uri="{BB962C8B-B14F-4D97-AF65-F5344CB8AC3E}">
-        <p14:creationId xmlns:p14="http://schemas.microsoft.com/office/powerpoint/2010/main" val="617481146"/>
+        <p14:creationId xmlns:p14="http://schemas.microsoft.com/office/powerpoint/2010/main" val="1395612808"/>
       </p:ext>
     </p:extLst>
   </p:cSld>
@@ -4043,8 +4644,12 @@
           <a:lstStyle/>
           <a:p>
             <a:r>
+              <a:rPr lang="hu-HU" dirty="0"/>
+              <a:t>Hulladékszállító (sittes) </a:t>
+            </a:r>
+            <a:r>
               <a:rPr lang="hu-HU" dirty="0" smtClean="0"/>
-              <a:t>Szállítás folyamata</a:t>
+              <a:t>konténerek</a:t>
             </a:r>
             <a:endParaRPr lang="hu-HU" dirty="0"/>
           </a:p>
@@ -4062,74 +4667,17 @@
         </p:nvSpPr>
         <p:spPr/>
         <p:txBody>
-          <a:bodyPr>
-            <a:normAutofit fontScale="92500" lnSpcReduction="10000"/>
-          </a:bodyPr>
-          <a:lstStyle/>
-          <a:p>
-            <a:pPr fontAlgn="base"/>
-            <a:r>
-              <a:rPr lang="hu-HU" b="1" dirty="0"/>
-              <a:t>Áru előkészítése és csomagolása</a:t>
-            </a:r>
-            <a:r>
-              <a:rPr lang="hu-HU" dirty="0"/>
-              <a:t> – Az árut megfelelően be kell csomagolni, hogy ellenálljon a hosszú szállítási időnek és a rakodás során fellépő erőhatásoknak.</a:t>
-            </a:r>
-          </a:p>
-          <a:p>
-            <a:pPr fontAlgn="base"/>
-            <a:r>
-              <a:rPr lang="hu-HU" b="1" dirty="0"/>
-              <a:t>Konténer berakodása</a:t>
-            </a:r>
-            <a:r>
-              <a:rPr lang="hu-HU" dirty="0"/>
-              <a:t> – Az árukat a megfelelő típusú és méretű konténerbe helyezik, ügyelve az optimális helykihasználásra.</a:t>
-            </a:r>
-          </a:p>
-          <a:p>
-            <a:pPr fontAlgn="base"/>
-            <a:r>
-              <a:rPr lang="hu-HU" b="1" dirty="0"/>
-              <a:t>Szállítás a kikötőbe vagy terminálra</a:t>
-            </a:r>
-            <a:r>
-              <a:rPr lang="hu-HU" dirty="0"/>
-              <a:t> – A konténert teherautóval vagy vasúton eljuttatják a kikötőbe, ahol a hajókra való berakodás történik.</a:t>
-            </a:r>
-          </a:p>
-          <a:p>
-            <a:pPr fontAlgn="base"/>
-            <a:r>
-              <a:rPr lang="hu-HU" b="1" dirty="0"/>
-              <a:t>Tengeri vagy szárazföldi szállítás</a:t>
-            </a:r>
-            <a:r>
-              <a:rPr lang="hu-HU" dirty="0"/>
-              <a:t> – A konténer eljut a célországba vagy régióba, ahol az érkező terminálon ismét kirakodásra kerül.</a:t>
-            </a:r>
-          </a:p>
-          <a:p>
-            <a:pPr fontAlgn="base"/>
-            <a:r>
-              <a:rPr lang="hu-HU" b="1" dirty="0"/>
-              <a:t>Végső kiszállítás</a:t>
-            </a:r>
-            <a:r>
-              <a:rPr lang="hu-HU" dirty="0"/>
-              <a:t> – A konténeres árut eljuttatják a végső címzetthez teherautóval vagy vonattal.</a:t>
-            </a:r>
-          </a:p>
-          <a:p>
-            <a:endParaRPr lang="hu-HU" dirty="0"/>
+          <a:bodyPr/>
+          <a:lstStyle/>
+          <a:p>
+            <a:endParaRPr lang="hu-HU"/>
           </a:p>
         </p:txBody>
       </p:sp>
     </p:spTree>
     <p:extLst>
       <p:ext uri="{BB962C8B-B14F-4D97-AF65-F5344CB8AC3E}">
-        <p14:creationId xmlns:p14="http://schemas.microsoft.com/office/powerpoint/2010/main" val="3403460335"/>
+        <p14:creationId xmlns:p14="http://schemas.microsoft.com/office/powerpoint/2010/main" val="1258890066"/>
       </p:ext>
     </p:extLst>
   </p:cSld>
@@ -4172,8 +4720,12 @@
           <a:lstStyle/>
           <a:p>
             <a:r>
+              <a:rPr lang="hu-HU" dirty="0"/>
+              <a:t>Speciális és mobil </a:t>
+            </a:r>
+            <a:r>
               <a:rPr lang="hu-HU" dirty="0" smtClean="0"/>
-              <a:t>Paritás használat</a:t>
+              <a:t>konténerek</a:t>
             </a:r>
             <a:endParaRPr lang="hu-HU" dirty="0"/>
           </a:p>
@@ -4194,107 +4746,14 @@
           <a:bodyPr/>
           <a:lstStyle/>
           <a:p>
-            <a:r>
-              <a:rPr lang="hu-HU" dirty="0"/>
-              <a:t>FOB – Free </a:t>
-            </a:r>
-            <a:r>
-              <a:rPr lang="hu-HU" dirty="0" err="1"/>
-              <a:t>On</a:t>
-            </a:r>
-            <a:r>
-              <a:rPr lang="hu-HU" dirty="0"/>
-              <a:t> </a:t>
-            </a:r>
-            <a:r>
-              <a:rPr lang="hu-HU" dirty="0" err="1"/>
-              <a:t>Board</a:t>
-            </a:r>
-            <a:endParaRPr lang="hu-HU" dirty="0"/>
-          </a:p>
-          <a:p>
-            <a:r>
-              <a:rPr lang="hu-HU" dirty="0"/>
-              <a:t>FCA (Free </a:t>
-            </a:r>
-            <a:r>
-              <a:rPr lang="hu-HU" dirty="0" err="1"/>
-              <a:t>Carrier</a:t>
-            </a:r>
-            <a:r>
-              <a:rPr lang="hu-HU" dirty="0"/>
-              <a:t>)</a:t>
-            </a:r>
-          </a:p>
-          <a:p>
-            <a:r>
-              <a:rPr lang="hu-HU" dirty="0"/>
-              <a:t>DAP (</a:t>
-            </a:r>
-            <a:r>
-              <a:rPr lang="hu-HU" dirty="0" err="1"/>
-              <a:t>Delivered</a:t>
-            </a:r>
-            <a:r>
-              <a:rPr lang="hu-HU" dirty="0"/>
-              <a:t> </a:t>
-            </a:r>
-            <a:r>
-              <a:rPr lang="hu-HU" dirty="0" err="1"/>
-              <a:t>at</a:t>
-            </a:r>
-            <a:r>
-              <a:rPr lang="hu-HU" dirty="0"/>
-              <a:t> </a:t>
-            </a:r>
-            <a:r>
-              <a:rPr lang="hu-HU" dirty="0" err="1"/>
-              <a:t>Place</a:t>
-            </a:r>
-            <a:r>
-              <a:rPr lang="hu-HU" dirty="0"/>
-              <a:t>)</a:t>
-            </a:r>
-          </a:p>
-          <a:p>
-            <a:r>
-              <a:rPr lang="hu-HU" dirty="0"/>
-              <a:t>DDP (</a:t>
-            </a:r>
-            <a:r>
-              <a:rPr lang="hu-HU" dirty="0" err="1"/>
-              <a:t>Delivered</a:t>
-            </a:r>
-            <a:r>
-              <a:rPr lang="hu-HU" dirty="0"/>
-              <a:t> </a:t>
-            </a:r>
-            <a:r>
-              <a:rPr lang="hu-HU" dirty="0" err="1"/>
-              <a:t>Duty</a:t>
-            </a:r>
-            <a:r>
-              <a:rPr lang="hu-HU" dirty="0"/>
-              <a:t> </a:t>
-            </a:r>
-            <a:r>
-              <a:rPr lang="hu-HU" dirty="0" err="1"/>
-              <a:t>Paid</a:t>
-            </a:r>
-            <a:r>
-              <a:rPr lang="hu-HU" dirty="0"/>
-              <a:t>)</a:t>
-            </a:r>
-          </a:p>
-          <a:p>
-            <a:endParaRPr lang="hu-HU" dirty="0"/>
+            <a:endParaRPr lang="hu-HU"/>
           </a:p>
         </p:txBody>
       </p:sp>
     </p:spTree>
     <p:extLst>
       <p:ext uri="{BB962C8B-B14F-4D97-AF65-F5344CB8AC3E}">
-        <p14:creationId xmlns:p14="http://schemas.microsoft.com/office/powerpoint/2010/main" val="2351424428"/>
+        <p14:creationId xmlns:p14="http://schemas.microsoft.com/office/powerpoint/2010/main" val="3488865086"/>
       </p:ext>
     </p:extLst>
   </p:cSld>
@@ -4338,7 +4797,7 @@
           <a:p>
             <a:r>
               <a:rPr lang="hu-HU" dirty="0" smtClean="0"/>
-              <a:t>Előnyök</a:t>
+              <a:t>Főbb konténer típusok</a:t>
             </a:r>
             <a:endParaRPr lang="hu-HU" dirty="0"/>
           </a:p>
@@ -4357,77 +4816,164 @@
         <p:spPr/>
         <p:txBody>
           <a:bodyPr>
-            <a:normAutofit fontScale="92500" lnSpcReduction="10000"/>
+            <a:normAutofit fontScale="77500" lnSpcReduction="20000"/>
           </a:bodyPr>
           <a:lstStyle/>
           <a:p>
-            <a:pPr fontAlgn="base"/>
             <a:r>
               <a:rPr lang="hu-HU" b="1" dirty="0"/>
-              <a:t>Költséghatékony</a:t>
-            </a:r>
-            <a:r>
-              <a:rPr lang="hu-HU" dirty="0"/>
-              <a:t> – A tömeges áruszállítás révén csökkenti az egy egységre jutó szállítási költségeket.</a:t>
-            </a:r>
-          </a:p>
-          <a:p>
-            <a:pPr fontAlgn="base"/>
+              <a:t>Általános szállítókonténerek</a:t>
+            </a:r>
+            <a:endParaRPr lang="hu-HU" dirty="0"/>
+          </a:p>
+          <a:p>
+            <a:pPr lvl="1"/>
+            <a:r>
+              <a:rPr lang="hu-HU" dirty="0"/>
+              <a:t>Standard (</a:t>
+            </a:r>
+            <a:r>
+              <a:rPr lang="hu-HU" dirty="0" err="1"/>
+              <a:t>Dry</a:t>
+            </a:r>
+            <a:r>
+              <a:rPr lang="hu-HU" dirty="0"/>
+              <a:t>) konténer</a:t>
+            </a:r>
+          </a:p>
+          <a:p>
+            <a:pPr lvl="1"/>
+            <a:r>
+              <a:rPr lang="hu-HU" dirty="0" err="1"/>
+              <a:t>High</a:t>
+            </a:r>
+            <a:r>
+              <a:rPr lang="hu-HU" dirty="0"/>
+              <a:t> </a:t>
+            </a:r>
+            <a:r>
+              <a:rPr lang="hu-HU" dirty="0" err="1"/>
+              <a:t>Cube</a:t>
+            </a:r>
+            <a:r>
+              <a:rPr lang="hu-HU" dirty="0"/>
+              <a:t> konténer</a:t>
+            </a:r>
+          </a:p>
+          <a:p>
             <a:r>
               <a:rPr lang="hu-HU" b="1" dirty="0"/>
-              <a:t>Biztonságos</a:t>
-            </a:r>
-            <a:r>
-              <a:rPr lang="hu-HU" dirty="0"/>
-              <a:t> – A zárt konténerek védik az árut az időjárás viszontagságaitól, lopástól és sérülésektől.</a:t>
-            </a:r>
-          </a:p>
-          <a:p>
-            <a:pPr fontAlgn="base"/>
-            <a:r>
-              <a:rPr lang="hu-HU" b="1" dirty="0" err="1"/>
-              <a:t>Intermodális</a:t>
-            </a:r>
+              <a:t>Speciális szállítókonténerek</a:t>
+            </a:r>
+            <a:endParaRPr lang="hu-HU" dirty="0"/>
+          </a:p>
+          <a:p>
+            <a:pPr lvl="1"/>
+            <a:r>
+              <a:rPr lang="hu-HU" dirty="0"/>
+              <a:t>Hűtőkonténer (</a:t>
+            </a:r>
+            <a:r>
+              <a:rPr lang="hu-HU" dirty="0" err="1"/>
+              <a:t>Reefer</a:t>
+            </a:r>
+            <a:r>
+              <a:rPr lang="hu-HU" dirty="0"/>
+              <a:t>)</a:t>
+            </a:r>
+          </a:p>
+          <a:p>
+            <a:pPr lvl="1"/>
+            <a:r>
+              <a:rPr lang="hu-HU" dirty="0"/>
+              <a:t>Tartálykonténer</a:t>
+            </a:r>
+          </a:p>
+          <a:p>
+            <a:pPr lvl="1"/>
+            <a:r>
+              <a:rPr lang="hu-HU" dirty="0"/>
+              <a:t>Open Top konténer</a:t>
+            </a:r>
+          </a:p>
+          <a:p>
+            <a:pPr lvl="1"/>
+            <a:r>
+              <a:rPr lang="hu-HU" dirty="0" err="1"/>
+              <a:t>Flat</a:t>
+            </a:r>
+            <a:r>
+              <a:rPr lang="hu-HU" dirty="0"/>
+              <a:t> </a:t>
+            </a:r>
+            <a:r>
+              <a:rPr lang="hu-HU" dirty="0" err="1"/>
+              <a:t>Rack</a:t>
+            </a:r>
+            <a:r>
+              <a:rPr lang="hu-HU" dirty="0"/>
+              <a:t> konténer</a:t>
+            </a:r>
+          </a:p>
+          <a:p>
+            <a:pPr lvl="1"/>
+            <a:r>
+              <a:rPr lang="hu-HU" dirty="0" err="1"/>
+              <a:t>Side</a:t>
+            </a:r>
+            <a:r>
+              <a:rPr lang="hu-HU" dirty="0"/>
+              <a:t> Open konténer</a:t>
+            </a:r>
+          </a:p>
+          <a:p>
+            <a:pPr lvl="1"/>
+            <a:r>
+              <a:rPr lang="hu-HU" dirty="0"/>
+              <a:t>Ventilált konténer</a:t>
+            </a:r>
+          </a:p>
+          <a:p>
             <a:r>
               <a:rPr lang="hu-HU" b="1" dirty="0"/>
-              <a:t> szállítás</a:t>
-            </a:r>
-            <a:r>
-              <a:rPr lang="hu-HU" dirty="0"/>
-              <a:t> – A konténerek könnyen mozgathatók különböző szállítási módok között (hajó, vonat, teherautó), ami rugalmas és hatékony logisztikai megoldást biztosít.</a:t>
-            </a:r>
-          </a:p>
-          <a:p>
-            <a:pPr fontAlgn="base"/>
-            <a:r>
-              <a:rPr lang="hu-HU" b="1" dirty="0"/>
-              <a:t>Gyors és megbízható</a:t>
-            </a:r>
-            <a:r>
-              <a:rPr lang="hu-HU" dirty="0"/>
-              <a:t> – Az egységesített logisztikai folyamatok révén a szállítási idők előre meghatározhatók és pontosabbak.</a:t>
-            </a:r>
-          </a:p>
-          <a:p>
-            <a:pPr fontAlgn="base"/>
-            <a:r>
-              <a:rPr lang="hu-HU" b="1" dirty="0"/>
-              <a:t>Környezetbarát</a:t>
-            </a:r>
-            <a:r>
-              <a:rPr lang="hu-HU" dirty="0"/>
-              <a:t> – A hatékony rakodás és szállítás csökkenti az üzemanyag-fogyasztást és a károsanyag-kibocsátást.</a:t>
-            </a:r>
-          </a:p>
-          <a:p>
+              <a:t>Egyéb felhasználású konténerek</a:t>
+            </a:r>
             <a:endParaRPr lang="hu-HU" dirty="0"/>
+          </a:p>
+          <a:p>
+            <a:pPr lvl="1"/>
+            <a:r>
+              <a:rPr lang="hu-HU" dirty="0"/>
+              <a:t>Irodakonténer</a:t>
+            </a:r>
+          </a:p>
+          <a:p>
+            <a:pPr lvl="1"/>
+            <a:r>
+              <a:rPr lang="hu-HU" dirty="0"/>
+              <a:t>Lakókonténer</a:t>
+            </a:r>
+          </a:p>
+          <a:p>
+            <a:pPr lvl="1"/>
+            <a:r>
+              <a:rPr lang="hu-HU" dirty="0"/>
+              <a:t>Raktárkonténer</a:t>
+            </a:r>
+          </a:p>
+          <a:p>
+            <a:pPr lvl="1"/>
+            <a:r>
+              <a:rPr lang="hu-HU" dirty="0"/>
+              <a:t>Hulladékszállító (sittes) konténer</a:t>
+            </a:r>
           </a:p>
         </p:txBody>
       </p:sp>
     </p:spTree>
     <p:extLst>
       <p:ext uri="{BB962C8B-B14F-4D97-AF65-F5344CB8AC3E}">
-        <p14:creationId xmlns:p14="http://schemas.microsoft.com/office/powerpoint/2010/main" val="3249197787"/>
+        <p14:creationId xmlns:p14="http://schemas.microsoft.com/office/powerpoint/2010/main" val="3034692917"/>
       </p:ext>
     </p:extLst>
   </p:cSld>
